--- a/Presentacion Tuya - Comite Presidencia.pptx
+++ b/Presentacion Tuya - Comite Presidencia.pptx
@@ -473,7 +473,7 @@
           </a:prstGeom>
           <a:extLst>
             <a:ext uri="{C572A759-6A51-4108-AA02-DFA0A04FC94B}">
-              <ma14:wrappingTextBoxFlag xmlns:ma14="http://schemas.microsoft.com/office/mac/drawingml/2011/main" xmlns="" val="0"/>
+              <ma14:wrappingTextBoxFlag xmlns="" xmlns:ma14="http://schemas.microsoft.com/office/mac/drawingml/2011/main" val="0"/>
             </a:ext>
           </a:extLst>
         </p:spPr>
@@ -774,7 +774,7 @@
           </a:prstGeom>
           <a:extLst>
             <a:ext uri="{C572A759-6A51-4108-AA02-DFA0A04FC94B}">
-              <ma14:wrappingTextBoxFlag xmlns:ma14="http://schemas.microsoft.com/office/mac/drawingml/2011/main" xmlns="" val="0"/>
+              <ma14:wrappingTextBoxFlag xmlns="" xmlns:ma14="http://schemas.microsoft.com/office/mac/drawingml/2011/main" val="0"/>
             </a:ext>
           </a:extLst>
         </p:spPr>
@@ -887,7 +887,7 @@
           </a:prstGeom>
           <a:extLst>
             <a:ext uri="{C572A759-6A51-4108-AA02-DFA0A04FC94B}">
-              <ma14:wrappingTextBoxFlag xmlns:ma14="http://schemas.microsoft.com/office/mac/drawingml/2011/main" xmlns="" val="0"/>
+              <ma14:wrappingTextBoxFlag xmlns="" xmlns:ma14="http://schemas.microsoft.com/office/mac/drawingml/2011/main" val="0"/>
             </a:ext>
           </a:extLst>
         </p:spPr>
@@ -1217,14 +1217,6 @@
 <file path=ppt/slides/slide1.xml><?xml version="1.0" encoding="utf-8"?>
 <p:sld xmlns:a="http://schemas.openxmlformats.org/drawingml/2006/main" xmlns:r="http://schemas.openxmlformats.org/officeDocument/2006/relationships" xmlns:p="http://schemas.openxmlformats.org/presentationml/2006/main">
   <p:cSld>
-    <p:bg>
-      <p:bgPr>
-        <a:solidFill>
-          <a:srgbClr val="F0EEE9"/>
-        </a:solidFill>
-        <a:effectLst/>
-      </p:bgPr>
-    </p:bg>
     <p:spTree>
       <p:nvGrpSpPr>
         <p:cNvPr id="1" name=""/>
@@ -1234,600 +1226,1165 @@
       <p:grpSpPr>
         <a:xfrm>
           <a:off x="0" y="0"/>
-          <a:ext cx="0" cy="0"/>
+          <a:ext cx="1" cy="1"/>
           <a:chOff x="0" y="0"/>
-          <a:chExt cx="0" cy="0"/>
+          <a:chExt cx="1" cy="1"/>
         </a:xfrm>
       </p:grpSpPr>
-      <p:pic>
-        <p:nvPicPr>
-          <p:cNvPr id="15" name="Imagen 14" descr="preencoded.png"/>
-          <p:cNvPicPr>
-            <a:picLocks noChangeAspect="1"/>
-          </p:cNvPicPr>
-          <p:nvPr/>
-        </p:nvPicPr>
-        <p:blipFill>
-          <a:blip r:embed="rId3"/>
-          <a:stretch>
-            <a:fillRect/>
-          </a:stretch>
-        </p:blipFill>
-        <p:spPr>
-          <a:xfrm>
-            <a:off x="850397" y="617078"/>
-            <a:ext cx="713229" cy="543068"/>
-          </a:xfrm>
-          <a:prstGeom prst="rect">
-            <a:avLst/>
-          </a:prstGeom>
-        </p:spPr>
-      </p:pic>
-      <p:cxnSp>
-        <p:nvCxnSpPr>
-          <p:cNvPr id="3" name="Regla Logo"/>
-          <p:cNvCxnSpPr/>
-          <p:nvPr/>
-        </p:nvCxnSpPr>
-        <p:spPr>
-          <a:xfrm>
-            <a:off x="1755648" y="495300"/>
-            <a:ext cx="0" cy="685800"/>
-          </a:xfrm>
-          <a:prstGeom prst="line">
-            <a:avLst/>
-          </a:prstGeom>
+      <p:sp>
+        <p:nvSpPr>
+          <p:cNvPr id="2" name="Eyebrow"/>
+          <p:cNvSpPr/>
+          <p:nvPr/>
+        </p:nvSpPr>
+        <p:spPr>
+          <a:xfrm>
+            <a:off x="822960" y="480060"/>
+            <a:ext cx="8915400" cy="342900"/>
+          </a:xfrm>
+          <a:prstGeom prst="rect">
+            <a:avLst/>
+          </a:prstGeom>
+          <a:noFill/>
+          <a:ln/>
+        </p:spPr>
+        <p:txBody>
+          <a:bodyPr wrap="square" lIns="0" tIns="0" rIns="0" bIns="0" rtlCol="0" anchor="ctr"/>
+          <a:lstStyle/>
+          <a:p>
+            <a:r>
+              <a:rPr lang="es-CO" sz="2100" b="1" kern="0" spc="240" dirty="0">
+                <a:solidFill>
+                  <a:srgbClr val="2B4CD9"/>
+                </a:solidFill>
+                <a:latin typeface="Roboto Condensed" panose="02000000000000000000" pitchFamily="2" charset="0"/>
+                <a:ea typeface="Roboto Condensed" panose="02000000000000000000" pitchFamily="2" charset="0"/>
+                <a:cs typeface="Roboto Condensed" panose="02000000000000000000" pitchFamily="2" charset="0"/>
+              </a:rPr>
+              <a:t>CICLO DE DESARROLLO ASISTIDO POR IA</a:t>
+            </a:r>
+          </a:p>
+        </p:txBody>
+      </p:sp>
+      <p:sp>
+        <p:nvSpPr>
+          <p:cNvPr id="3" name="Titulo"/>
+          <p:cNvSpPr/>
+          <p:nvPr/>
+        </p:nvSpPr>
+        <p:spPr>
+          <a:xfrm>
+            <a:off x="822960" y="987552"/>
+            <a:ext cx="16596360" cy="768096"/>
+          </a:xfrm>
+          <a:prstGeom prst="rect">
+            <a:avLst/>
+          </a:prstGeom>
+          <a:noFill/>
+          <a:ln/>
+        </p:spPr>
+        <p:txBody>
+          <a:bodyPr wrap="square" lIns="0" tIns="0" rIns="0" bIns="0" rtlCol="0" anchor="ctr">
+            <a:normAutofit/>
+          </a:bodyPr>
+          <a:lstStyle/>
+          <a:p>
+            <a:r>
+              <a:rPr lang="es-CO" sz="4200" b="1">
+                <a:solidFill>
+                  <a:srgbClr val="07133D"/>
+                </a:solidFill>
+                <a:latin typeface="Roboto Condensed" panose="02000000000000000000" pitchFamily="2" charset="0"/>
+                <a:ea typeface="Roboto Condensed" panose="02000000000000000000" pitchFamily="2" charset="0"/>
+                <a:cs typeface="Roboto Condensed" panose="02000000000000000000" pitchFamily="2" charset="0"/>
+              </a:rPr>
+              <a:t>La IA pasa de casos puntuales a capacidad instalada</a:t>
+            </a:r>
+          </a:p>
+        </p:txBody>
+      </p:sp>
+      <p:sp>
+        <p:nvSpPr>
+          <p:cNvPr id="4" name="Bajada"/>
+          <p:cNvSpPr/>
+          <p:nvPr/>
+        </p:nvSpPr>
+        <p:spPr>
+          <a:xfrm>
+            <a:off x="822960" y="1824228"/>
+            <a:ext cx="16459200" cy="521208"/>
+          </a:xfrm>
+          <a:prstGeom prst="rect">
+            <a:avLst/>
+          </a:prstGeom>
+          <a:noFill/>
+          <a:ln/>
+        </p:spPr>
+        <p:txBody>
+          <a:bodyPr wrap="square" lIns="0" tIns="0" rIns="0" bIns="0" rtlCol="0" anchor="ctr"/>
+          <a:lstStyle/>
+          <a:p>
+            <a:r>
+              <a:rPr lang="es-CO" sz="2400">
+                <a:solidFill>
+                  <a:srgbClr val="5B6880"/>
+                </a:solidFill>
+                <a:latin typeface="Roboto Condensed" panose="02000000000000000000" pitchFamily="2" charset="0"/>
+                <a:ea typeface="Roboto Condensed" panose="02000000000000000000" pitchFamily="2" charset="0"/>
+                <a:cs typeface="Roboto Condensed" panose="02000000000000000000" pitchFamily="2" charset="0"/>
+              </a:rPr>
+              <a:t>La prueba de concepto ya cuantifica el ahorro; el piloto con células lo lleva al ciclo completo de Desarrollo y Calidad.</a:t>
+            </a:r>
+          </a:p>
+        </p:txBody>
+      </p:sp>
+      <p:sp>
+        <p:nvSpPr>
+          <p:cNvPr id="5" name="Circulo 1"/>
+          <p:cNvSpPr/>
+          <p:nvPr/>
+        </p:nvSpPr>
+        <p:spPr>
+          <a:xfrm>
+            <a:off x="2972562" y="2560320"/>
+            <a:ext cx="850392" cy="850392"/>
+          </a:xfrm>
+          <a:prstGeom prst="ellipse">
+            <a:avLst/>
+          </a:prstGeom>
+          <a:solidFill>
+            <a:srgbClr val="FFFFFF"/>
+          </a:solidFill>
+          <a:ln w="25400">
+            <a:solidFill>
+              <a:srgbClr val="07133D"/>
+            </a:solidFill>
+            <a:prstDash val="solid"/>
+          </a:ln>
+        </p:spPr>
+        <p:txBody>
+          <a:bodyPr/>
+          <a:lstStyle/>
+          <a:p>
+            <a:endParaRPr lang="es-CO"/>
+          </a:p>
+        </p:txBody>
+      </p:sp>
+      <p:sp>
+        <p:nvSpPr>
+          <p:cNvPr id="6" name="Num 1"/>
+          <p:cNvSpPr/>
+          <p:nvPr/>
+        </p:nvSpPr>
+        <p:spPr>
+          <a:xfrm>
+            <a:off x="2972562" y="2761488"/>
+            <a:ext cx="850392" cy="438912"/>
+          </a:xfrm>
+          <a:prstGeom prst="rect">
+            <a:avLst/>
+          </a:prstGeom>
+          <a:noFill/>
+          <a:ln/>
+        </p:spPr>
+        <p:txBody>
+          <a:bodyPr wrap="square" lIns="0" tIns="0" rIns="0" bIns="0" rtlCol="0" anchor="ctr"/>
+          <a:lstStyle/>
+          <a:p>
+            <a:pPr algn="ctr"/>
+            <a:r>
+              <a:rPr lang="es-CO" sz="2400" b="1">
+                <a:solidFill>
+                  <a:srgbClr val="07133D"/>
+                </a:solidFill>
+                <a:latin typeface="Roboto Condensed" panose="02000000000000000000" pitchFamily="2" charset="0"/>
+                <a:ea typeface="Roboto Condensed" panose="02000000000000000000" pitchFamily="2" charset="0"/>
+                <a:cs typeface="Roboto Condensed" panose="02000000000000000000" pitchFamily="2" charset="0"/>
+              </a:rPr>
+              <a:t>1</a:t>
+            </a:r>
+          </a:p>
+        </p:txBody>
+      </p:sp>
+      <p:sp>
+        <p:nvSpPr>
+          <p:cNvPr id="7" name="Circulo 2"/>
+          <p:cNvSpPr/>
+          <p:nvPr/>
+        </p:nvSpPr>
+        <p:spPr>
+          <a:xfrm>
+            <a:off x="8716518" y="2560320"/>
+            <a:ext cx="850392" cy="850392"/>
+          </a:xfrm>
+          <a:prstGeom prst="ellipse">
+            <a:avLst/>
+          </a:prstGeom>
+          <a:solidFill>
+            <a:srgbClr val="FFFFFF"/>
+          </a:solidFill>
+          <a:ln w="25400">
+            <a:solidFill>
+              <a:srgbClr val="07133D"/>
+            </a:solidFill>
+            <a:prstDash val="solid"/>
+          </a:ln>
+        </p:spPr>
+        <p:txBody>
+          <a:bodyPr/>
+          <a:lstStyle/>
+          <a:p>
+            <a:endParaRPr lang="es-CO"/>
+          </a:p>
+        </p:txBody>
+      </p:sp>
+      <p:sp>
+        <p:nvSpPr>
+          <p:cNvPr id="8" name="Num 2"/>
+          <p:cNvSpPr/>
+          <p:nvPr/>
+        </p:nvSpPr>
+        <p:spPr>
+          <a:xfrm>
+            <a:off x="8716518" y="2761488"/>
+            <a:ext cx="850392" cy="438912"/>
+          </a:xfrm>
+          <a:prstGeom prst="rect">
+            <a:avLst/>
+          </a:prstGeom>
+          <a:noFill/>
+          <a:ln/>
+        </p:spPr>
+        <p:txBody>
+          <a:bodyPr wrap="square" lIns="0" tIns="0" rIns="0" bIns="0" rtlCol="0" anchor="ctr"/>
+          <a:lstStyle/>
+          <a:p>
+            <a:pPr algn="ctr"/>
+            <a:r>
+              <a:rPr lang="es-CO" sz="2400" b="1">
+                <a:solidFill>
+                  <a:srgbClr val="07133D"/>
+                </a:solidFill>
+                <a:latin typeface="Roboto Condensed" panose="02000000000000000000" pitchFamily="2" charset="0"/>
+                <a:ea typeface="Roboto Condensed" panose="02000000000000000000" pitchFamily="2" charset="0"/>
+                <a:cs typeface="Roboto Condensed" panose="02000000000000000000" pitchFamily="2" charset="0"/>
+              </a:rPr>
+              <a:t>2</a:t>
+            </a:r>
+          </a:p>
+        </p:txBody>
+      </p:sp>
+      <p:sp>
+        <p:nvSpPr>
+          <p:cNvPr id="9" name="Circulo 3"/>
+          <p:cNvSpPr/>
+          <p:nvPr/>
+        </p:nvSpPr>
+        <p:spPr>
+          <a:xfrm>
+            <a:off x="14460474" y="2560320"/>
+            <a:ext cx="850392" cy="850392"/>
+          </a:xfrm>
+          <a:prstGeom prst="ellipse">
+            <a:avLst/>
+          </a:prstGeom>
+          <a:solidFill>
+            <a:srgbClr val="2B4CD9"/>
+          </a:solidFill>
+          <a:ln w="25400">
+            <a:solidFill>
+              <a:srgbClr val="07133D"/>
+            </a:solidFill>
+            <a:prstDash val="solid"/>
+          </a:ln>
+        </p:spPr>
+        <p:txBody>
+          <a:bodyPr/>
+          <a:lstStyle/>
+          <a:p>
+            <a:endParaRPr lang="es-CO"/>
+          </a:p>
+        </p:txBody>
+      </p:sp>
+      <p:sp>
+        <p:nvSpPr>
+          <p:cNvPr id="10" name="Num 3"/>
+          <p:cNvSpPr/>
+          <p:nvPr/>
+        </p:nvSpPr>
+        <p:spPr>
+          <a:xfrm>
+            <a:off x="14460474" y="2761488"/>
+            <a:ext cx="850392" cy="438912"/>
+          </a:xfrm>
+          <a:prstGeom prst="rect">
+            <a:avLst/>
+          </a:prstGeom>
+          <a:noFill/>
+          <a:ln/>
+        </p:spPr>
+        <p:txBody>
+          <a:bodyPr wrap="square" lIns="0" tIns="0" rIns="0" bIns="0" rtlCol="0" anchor="ctr"/>
+          <a:lstStyle/>
+          <a:p>
+            <a:pPr algn="ctr"/>
+            <a:r>
+              <a:rPr lang="es-CO" sz="2400" b="1">
+                <a:solidFill>
+                  <a:srgbClr val="FFFFFF"/>
+                </a:solidFill>
+                <a:latin typeface="Roboto Condensed" panose="02000000000000000000" pitchFamily="2" charset="0"/>
+                <a:ea typeface="Roboto Condensed" panose="02000000000000000000" pitchFamily="2" charset="0"/>
+                <a:cs typeface="Roboto Condensed" panose="02000000000000000000" pitchFamily="2" charset="0"/>
+              </a:rPr>
+              <a:t>3</a:t>
+            </a:r>
+          </a:p>
+        </p:txBody>
+      </p:sp>
+      <p:sp>
+        <p:nvSpPr>
+          <p:cNvPr id="11" name="Etiqueta 1"/>
+          <p:cNvSpPr/>
+          <p:nvPr/>
+        </p:nvSpPr>
+        <p:spPr>
+          <a:xfrm>
+            <a:off x="754380" y="3520440"/>
+            <a:ext cx="5286756" cy="384048"/>
+          </a:xfrm>
+          <a:prstGeom prst="rect">
+            <a:avLst/>
+          </a:prstGeom>
+          <a:noFill/>
+          <a:ln/>
+        </p:spPr>
+        <p:txBody>
+          <a:bodyPr wrap="square" lIns="0" tIns="0" rIns="0" bIns="0" rtlCol="0" anchor="ctr"/>
+          <a:lstStyle/>
+          <a:p>
+            <a:pPr algn="ctr"/>
+            <a:r>
+              <a:rPr lang="es-CO" sz="1650" b="1">
+                <a:solidFill>
+                  <a:srgbClr val="07133D"/>
+                </a:solidFill>
+                <a:latin typeface="Roboto Condensed" panose="02000000000000000000" pitchFamily="2" charset="0"/>
+                <a:ea typeface="Roboto Condensed" panose="02000000000000000000" pitchFamily="2" charset="0"/>
+                <a:cs typeface="Roboto Condensed" panose="02000000000000000000" pitchFamily="2" charset="0"/>
+              </a:rPr>
+              <a:t>SITUACIÓN ACTUAL</a:t>
+            </a:r>
+          </a:p>
+        </p:txBody>
+      </p:sp>
+      <p:sp>
+        <p:nvSpPr>
+          <p:cNvPr id="12" name="Etiqueta 2"/>
+          <p:cNvSpPr/>
+          <p:nvPr/>
+        </p:nvSpPr>
+        <p:spPr>
+          <a:xfrm>
+            <a:off x="6498336" y="3520440"/>
+            <a:ext cx="5286756" cy="384048"/>
+          </a:xfrm>
+          <a:prstGeom prst="rect">
+            <a:avLst/>
+          </a:prstGeom>
+          <a:noFill/>
+          <a:ln/>
+        </p:spPr>
+        <p:txBody>
+          <a:bodyPr wrap="square" lIns="0" tIns="0" rIns="0" bIns="0" rtlCol="0" anchor="ctr"/>
+          <a:lstStyle/>
+          <a:p>
+            <a:pPr algn="ctr"/>
+            <a:r>
+              <a:rPr lang="es-CO" sz="1650" b="1">
+                <a:solidFill>
+                  <a:srgbClr val="07133D"/>
+                </a:solidFill>
+                <a:latin typeface="Roboto Condensed" panose="02000000000000000000" pitchFamily="2" charset="0"/>
+                <a:ea typeface="Roboto Condensed" panose="02000000000000000000" pitchFamily="2" charset="0"/>
+                <a:cs typeface="Roboto Condensed" panose="02000000000000000000" pitchFamily="2" charset="0"/>
+              </a:rPr>
+              <a:t>OPORTUNIDAD DE MEJORA</a:t>
+            </a:r>
+          </a:p>
+        </p:txBody>
+      </p:sp>
+      <p:sp>
+        <p:nvSpPr>
+          <p:cNvPr id="13" name="Etiqueta 3"/>
+          <p:cNvSpPr/>
+          <p:nvPr/>
+        </p:nvSpPr>
+        <p:spPr>
+          <a:xfrm>
+            <a:off x="12242292" y="3520440"/>
+            <a:ext cx="5286756" cy="384048"/>
+          </a:xfrm>
+          <a:prstGeom prst="rect">
+            <a:avLst/>
+          </a:prstGeom>
+          <a:noFill/>
+          <a:ln/>
+        </p:spPr>
+        <p:txBody>
+          <a:bodyPr wrap="square" lIns="0" tIns="0" rIns="0" bIns="0" rtlCol="0" anchor="ctr"/>
+          <a:lstStyle/>
+          <a:p>
+            <a:pPr algn="ctr"/>
+            <a:r>
+              <a:rPr lang="es-CO" sz="1650" b="1">
+                <a:solidFill>
+                  <a:srgbClr val="2B4CD9"/>
+                </a:solidFill>
+                <a:latin typeface="Roboto Condensed" panose="02000000000000000000" pitchFamily="2" charset="0"/>
+                <a:ea typeface="Roboto Condensed" panose="02000000000000000000" pitchFamily="2" charset="0"/>
+                <a:cs typeface="Roboto Condensed" panose="02000000000000000000" pitchFamily="2" charset="0"/>
+              </a:rPr>
+              <a:t>TRANSFORMACIÓN</a:t>
+            </a:r>
+          </a:p>
+        </p:txBody>
+      </p:sp>
+      <p:sp>
+        <p:nvSpPr>
+          <p:cNvPr id="14" name="Tarjeta 1"/>
+          <p:cNvSpPr/>
+          <p:nvPr/>
+        </p:nvSpPr>
+        <p:spPr>
+          <a:xfrm>
+            <a:off x="754380" y="4023360"/>
+            <a:ext cx="5286756" cy="5120640"/>
+          </a:xfrm>
+          <a:prstGeom prst="roundRect">
+            <a:avLst>
+              <a:gd name="adj" fmla="val 5405"/>
+            </a:avLst>
+          </a:prstGeom>
+          <a:solidFill>
+            <a:srgbClr val="FFFFFF"/>
+          </a:solidFill>
           <a:ln w="12700">
             <a:solidFill>
-              <a:srgbClr val="D8D0C6"/>
+              <a:srgbClr val="DCD6CE"/>
             </a:solidFill>
+            <a:prstDash val="solid"/>
           </a:ln>
         </p:spPr>
-        <p:style>
-          <a:lnRef idx="2">
-            <a:schemeClr val="accent1"/>
-          </a:lnRef>
-          <a:fillRef idx="0">
-            <a:schemeClr val="accent1"/>
-          </a:fillRef>
-          <a:effectRef idx="1">
-            <a:schemeClr val="accent1"/>
-          </a:effectRef>
-          <a:fontRef idx="minor">
-            <a:schemeClr val="tx1"/>
-          </a:fontRef>
-        </p:style>
-      </p:cxnSp>
-      <p:sp>
-        <p:nvSpPr>
-          <p:cNvPr id="4" name="Titulo"/>
-          <p:cNvSpPr txBox="1"/>
-          <p:nvPr/>
-        </p:nvSpPr>
-        <p:spPr>
-          <a:xfrm>
-            <a:off x="2071116" y="627888"/>
-            <a:ext cx="10668000" cy="1135380"/>
-          </a:xfrm>
-          <a:prstGeom prst="rect">
-            <a:avLst/>
-          </a:prstGeom>
-          <a:noFill/>
-        </p:spPr>
-        <p:txBody>
-          <a:bodyPr wrap="square" lIns="0" tIns="0" rIns="0" bIns="0" rtlCol="0">
-            <a:noAutofit/>
-          </a:bodyPr>
-          <a:lstStyle/>
-          <a:p>
-            <a:pPr>
-              <a:lnSpc>
-                <a:spcPct val="90000"/>
-              </a:lnSpc>
-            </a:pPr>
-            <a:r>
-              <a:rPr lang="es-CO" sz="4050" b="1" dirty="0">
-                <a:solidFill>
-                  <a:srgbClr val="111111"/>
-                </a:solidFill>
-                <a:latin typeface="Segoe UI" panose="020B0502040204020203" pitchFamily="34" charset="0"/>
-              </a:rPr>
-              <a:t>IA en el ciclo de desarrollo de soluciones</a:t>
-            </a:r>
-          </a:p>
-        </p:txBody>
-      </p:sp>
-      <p:sp>
-        <p:nvSpPr>
-          <p:cNvPr id="5" name="Barra Titulo"/>
-          <p:cNvSpPr/>
-          <p:nvPr/>
-        </p:nvSpPr>
-        <p:spPr>
-          <a:xfrm>
-            <a:off x="2071116" y="1790700"/>
-            <a:ext cx="914400" cy="76200"/>
-          </a:xfrm>
-          <a:prstGeom prst="rect">
-            <a:avLst/>
+        <p:txBody>
+          <a:bodyPr/>
+          <a:lstStyle/>
+          <a:p>
+            <a:endParaRPr lang="es-CO"/>
+          </a:p>
+        </p:txBody>
+      </p:sp>
+      <p:sp>
+        <p:nvSpPr>
+          <p:cNvPr id="15" name="Tarjeta 2"/>
+          <p:cNvSpPr/>
+          <p:nvPr/>
+        </p:nvSpPr>
+        <p:spPr>
+          <a:xfrm>
+            <a:off x="6498336" y="4023360"/>
+            <a:ext cx="5286756" cy="5120640"/>
+          </a:xfrm>
+          <a:prstGeom prst="roundRect">
+            <a:avLst>
+              <a:gd name="adj" fmla="val 5405"/>
+            </a:avLst>
           </a:prstGeom>
           <a:solidFill>
-            <a:srgbClr val="EE1C25"/>
+            <a:srgbClr val="FFFFFF"/>
+          </a:solidFill>
+          <a:ln w="12700">
+            <a:solidFill>
+              <a:srgbClr val="DCD6CE"/>
+            </a:solidFill>
+            <a:prstDash val="solid"/>
+          </a:ln>
+        </p:spPr>
+        <p:txBody>
+          <a:bodyPr/>
+          <a:lstStyle/>
+          <a:p>
+            <a:endParaRPr lang="es-CO"/>
+          </a:p>
+        </p:txBody>
+      </p:sp>
+      <p:sp>
+        <p:nvSpPr>
+          <p:cNvPr id="16" name="Tarjeta 3"/>
+          <p:cNvSpPr/>
+          <p:nvPr/>
+        </p:nvSpPr>
+        <p:spPr>
+          <a:xfrm>
+            <a:off x="12242292" y="4023360"/>
+            <a:ext cx="5286756" cy="5120640"/>
+          </a:xfrm>
+          <a:prstGeom prst="roundRect">
+            <a:avLst>
+              <a:gd name="adj" fmla="val 5405"/>
+            </a:avLst>
+          </a:prstGeom>
+          <a:solidFill>
+            <a:srgbClr val="FFFFFF"/>
+          </a:solidFill>
+          <a:ln w="12700">
+            <a:solidFill>
+              <a:srgbClr val="DCD6CE"/>
+            </a:solidFill>
+            <a:prstDash val="solid"/>
+          </a:ln>
+        </p:spPr>
+        <p:txBody>
+          <a:bodyPr/>
+          <a:lstStyle/>
+          <a:p>
+            <a:endParaRPr lang="es-CO"/>
+          </a:p>
+        </p:txBody>
+      </p:sp>
+      <p:sp>
+        <p:nvSpPr>
+          <p:cNvPr id="17" name="Punto 1a"/>
+          <p:cNvSpPr/>
+          <p:nvPr/>
+        </p:nvSpPr>
+        <p:spPr>
+          <a:xfrm>
+            <a:off x="1211580" y="4777740"/>
+            <a:ext cx="137160" cy="137160"/>
+          </a:xfrm>
+          <a:prstGeom prst="ellipse">
+            <a:avLst/>
+          </a:prstGeom>
+          <a:solidFill>
+            <a:srgbClr val="2B4CD9"/>
           </a:solidFill>
           <a:ln>
             <a:noFill/>
           </a:ln>
-          <a:effectLst/>
-        </p:spPr>
-        <p:txBody>
-          <a:bodyPr rtlCol="0" anchor="ctr"/>
-          <a:lstStyle/>
-          <a:p>
-            <a:pPr algn="ctr"/>
-            <a:endParaRPr lang="es-CO" sz="1200"/>
-          </a:p>
-        </p:txBody>
-      </p:sp>
-      <p:sp>
-        <p:nvSpPr>
-          <p:cNvPr id="7" name="Bajada"/>
-          <p:cNvSpPr txBox="1"/>
-          <p:nvPr/>
-        </p:nvSpPr>
-        <p:spPr>
-          <a:xfrm>
-            <a:off x="2071116" y="2103120"/>
-            <a:ext cx="14500000" cy="457200"/>
-          </a:xfrm>
-          <a:prstGeom prst="rect">
-            <a:avLst/>
-          </a:prstGeom>
-          <a:noFill/>
-        </p:spPr>
-        <p:txBody>
-          <a:bodyPr wrap="square" lIns="0" tIns="0" rIns="0" bIns="0" rtlCol="0">
-            <a:noAutofit/>
-          </a:bodyPr>
-          <a:lstStyle/>
-          <a:p>
-            <a:pPr>
-              <a:lnSpc>
-                <a:spcPct val="95000"/>
-              </a:lnSpc>
-            </a:pPr>
-            <a:r>
-              <a:rPr lang="es-CO" sz="1950" b="1" dirty="0">
-                <a:solidFill>
-                  <a:srgbClr val="EE1C25"/>
-                </a:solidFill>
-                <a:latin typeface="Segoe UI" panose="020B0502040204020203" pitchFamily="34" charset="0"/>
-              </a:rPr>
-              <a:t>De casos de uso puntuales a capacidad instalada</a:t>
-            </a:r>
-            <a:r>
-              <a:rPr lang="es-CO" sz="1950" dirty="0">
-                <a:solidFill>
-                  <a:srgbClr val="3A342E"/>
-                </a:solidFill>
-                <a:latin typeface="Segoe UI" panose="020B0502040204020203" pitchFamily="34" charset="0"/>
-              </a:rPr>
-              <a:t> en el ciclo de Desarrollo y Calidad.</a:t>
-            </a:r>
-          </a:p>
-        </p:txBody>
-      </p:sp>
-      <p:cxnSp>
-        <p:nvCxnSpPr>
-          <p:cNvPr id="8" name="Divisor Vertical 1"/>
-          <p:cNvCxnSpPr/>
-          <p:nvPr/>
-        </p:nvCxnSpPr>
-        <p:spPr>
-          <a:xfrm>
-            <a:off x="6277356" y="2880360"/>
-            <a:ext cx="0" cy="6537960"/>
-          </a:xfrm>
-          <a:prstGeom prst="line">
-            <a:avLst/>
-          </a:prstGeom>
-          <a:ln w="12700">
-            <a:solidFill>
-              <a:srgbClr val="D8D0C6"/>
-            </a:solidFill>
-          </a:ln>
-        </p:spPr>
-        <p:style>
-          <a:lnRef idx="2">
-            <a:schemeClr val="accent1"/>
-          </a:lnRef>
-          <a:fillRef idx="0">
-            <a:schemeClr val="accent1"/>
-          </a:fillRef>
-          <a:effectRef idx="1">
-            <a:schemeClr val="accent1"/>
-          </a:effectRef>
-          <a:fontRef idx="minor">
-            <a:schemeClr val="tx1"/>
-          </a:fontRef>
-        </p:style>
-      </p:cxnSp>
-      <p:cxnSp>
-        <p:nvCxnSpPr>
-          <p:cNvPr id="9" name="Divisor Vertical 2"/>
-          <p:cNvCxnSpPr/>
-          <p:nvPr/>
-        </p:nvCxnSpPr>
-        <p:spPr>
-          <a:xfrm>
-            <a:off x="12019788" y="2880360"/>
-            <a:ext cx="0" cy="6537960"/>
-          </a:xfrm>
-          <a:prstGeom prst="line">
-            <a:avLst/>
-          </a:prstGeom>
-          <a:ln w="12700">
-            <a:solidFill>
-              <a:srgbClr val="D8D0C6"/>
-            </a:solidFill>
-          </a:ln>
-        </p:spPr>
-        <p:style>
-          <a:lnRef idx="2">
-            <a:schemeClr val="accent1"/>
-          </a:lnRef>
-          <a:fillRef idx="0">
-            <a:schemeClr val="accent1"/>
-          </a:fillRef>
-          <a:effectRef idx="1">
-            <a:schemeClr val="accent1"/>
-          </a:effectRef>
-          <a:fontRef idx="minor">
-            <a:schemeClr val="tx1"/>
-          </a:fontRef>
-        </p:style>
-      </p:cxnSp>
-      <p:sp>
-        <p:nvSpPr>
-          <p:cNvPr id="10" name="Header Col 1"/>
-          <p:cNvSpPr txBox="1"/>
-          <p:nvPr/>
-        </p:nvSpPr>
-        <p:spPr>
-          <a:xfrm>
-            <a:off x="877824" y="2880360"/>
-            <a:ext cx="5056632" cy="384048"/>
-          </a:xfrm>
-          <a:prstGeom prst="rect">
-            <a:avLst/>
-          </a:prstGeom>
-          <a:noFill/>
-        </p:spPr>
-        <p:txBody>
-          <a:bodyPr wrap="square" lIns="0" tIns="0" rIns="0" bIns="0" rtlCol="0">
-            <a:noAutofit/>
-          </a:bodyPr>
-          <a:lstStyle/>
-          <a:p>
-            <a:r>
-              <a:rPr lang="es-CO" sz="2100" b="1" dirty="0">
-                <a:solidFill>
-                  <a:srgbClr val="7A7269"/>
-                </a:solidFill>
-                <a:latin typeface="Consolas" panose="020B0609020204030204" pitchFamily="49" charset="0"/>
-              </a:rPr>
-              <a:t>01</a:t>
-            </a:r>
-            <a:r>
-              <a:rPr lang="es-CO" sz="1350" spc="240" dirty="0">
-                <a:solidFill>
-                  <a:srgbClr val="7A7269"/>
-                </a:solidFill>
-                <a:latin typeface="Consolas" panose="020B0609020204030204" pitchFamily="49" charset="0"/>
-              </a:rPr>
-              <a:t>   SITUACIÓN ACTUAL</a:t>
-            </a:r>
-          </a:p>
-        </p:txBody>
-      </p:sp>
-      <p:sp>
-        <p:nvSpPr>
-          <p:cNvPr id="11" name="Header Col 2"/>
-          <p:cNvSpPr txBox="1"/>
-          <p:nvPr/>
-        </p:nvSpPr>
-        <p:spPr>
-          <a:xfrm>
-            <a:off x="6620256" y="2880360"/>
-            <a:ext cx="5056632" cy="384048"/>
-          </a:xfrm>
-          <a:prstGeom prst="rect">
-            <a:avLst/>
-          </a:prstGeom>
-          <a:noFill/>
-        </p:spPr>
-        <p:txBody>
-          <a:bodyPr wrap="square" lIns="0" tIns="0" rIns="0" bIns="0" rtlCol="0">
-            <a:noAutofit/>
-          </a:bodyPr>
-          <a:lstStyle/>
-          <a:p>
-            <a:r>
-              <a:rPr lang="es-CO" sz="2100" b="1" dirty="0">
-                <a:solidFill>
-                  <a:srgbClr val="111111"/>
-                </a:solidFill>
-                <a:latin typeface="Consolas" panose="020B0609020204030204" pitchFamily="49" charset="0"/>
-              </a:rPr>
-              <a:t>02</a:t>
-            </a:r>
-            <a:r>
-              <a:rPr lang="es-CO" sz="1350" spc="240" dirty="0">
-                <a:solidFill>
-                  <a:srgbClr val="7A7269"/>
-                </a:solidFill>
-                <a:latin typeface="Consolas" panose="020B0609020204030204" pitchFamily="49" charset="0"/>
-              </a:rPr>
-              <a:t>   OPORTUNIDAD DE MEJORA</a:t>
-            </a:r>
-          </a:p>
-        </p:txBody>
-      </p:sp>
-      <p:sp>
-        <p:nvSpPr>
-          <p:cNvPr id="12" name="Header Col 3"/>
-          <p:cNvSpPr txBox="1"/>
-          <p:nvPr/>
-        </p:nvSpPr>
-        <p:spPr>
-          <a:xfrm>
-            <a:off x="12362688" y="2880360"/>
-            <a:ext cx="5056632" cy="384048"/>
-          </a:xfrm>
-          <a:prstGeom prst="rect">
-            <a:avLst/>
-          </a:prstGeom>
-          <a:noFill/>
-        </p:spPr>
-        <p:txBody>
-          <a:bodyPr wrap="square" lIns="0" tIns="0" rIns="0" bIns="0" rtlCol="0">
-            <a:noAutofit/>
-          </a:bodyPr>
-          <a:lstStyle/>
-          <a:p>
-            <a:r>
-              <a:rPr lang="es-CO" sz="2100" b="1" dirty="0">
-                <a:solidFill>
-                  <a:srgbClr val="EE1C25"/>
-                </a:solidFill>
-                <a:latin typeface="Consolas" panose="020B0609020204030204" pitchFamily="49" charset="0"/>
-              </a:rPr>
-              <a:t>03</a:t>
-            </a:r>
-            <a:r>
-              <a:rPr lang="es-CO" sz="1350" spc="240" dirty="0">
-                <a:solidFill>
-                  <a:srgbClr val="EE1C25"/>
-                </a:solidFill>
-                <a:latin typeface="Consolas" panose="020B0609020204030204" pitchFamily="49" charset="0"/>
-              </a:rPr>
-              <a:t>   TRANSFORMACIÓN</a:t>
-            </a:r>
-          </a:p>
-        </p:txBody>
-      </p:sp>
-      <p:cxnSp>
-        <p:nvCxnSpPr>
-          <p:cNvPr id="13" name="Regla Col 1"/>
-          <p:cNvCxnSpPr/>
-          <p:nvPr/>
-        </p:nvCxnSpPr>
-        <p:spPr>
-          <a:xfrm>
-            <a:off x="877824" y="3383280"/>
-            <a:ext cx="5056632" cy="0"/>
-          </a:xfrm>
-          <a:prstGeom prst="line">
-            <a:avLst/>
-          </a:prstGeom>
-          <a:ln w="12700">
-            <a:solidFill>
-              <a:srgbClr val="D8D0C6"/>
-            </a:solidFill>
-          </a:ln>
-        </p:spPr>
-        <p:style>
-          <a:lnRef idx="2">
-            <a:schemeClr val="accent1"/>
-          </a:lnRef>
-          <a:fillRef idx="0">
-            <a:schemeClr val="accent1"/>
-          </a:fillRef>
-          <a:effectRef idx="1">
-            <a:schemeClr val="accent1"/>
-          </a:effectRef>
-          <a:fontRef idx="minor">
-            <a:schemeClr val="tx1"/>
-          </a:fontRef>
-        </p:style>
-      </p:cxnSp>
-      <p:cxnSp>
-        <p:nvCxnSpPr>
-          <p:cNvPr id="14" name="Regla Col 2"/>
-          <p:cNvCxnSpPr/>
-          <p:nvPr/>
-        </p:nvCxnSpPr>
-        <p:spPr>
-          <a:xfrm>
-            <a:off x="6620256" y="3383280"/>
-            <a:ext cx="5056632" cy="0"/>
-          </a:xfrm>
-          <a:prstGeom prst="line">
-            <a:avLst/>
-          </a:prstGeom>
-          <a:ln w="12700">
-            <a:solidFill>
-              <a:srgbClr val="D8D0C6"/>
-            </a:solidFill>
-          </a:ln>
-        </p:spPr>
-        <p:style>
-          <a:lnRef idx="2">
-            <a:schemeClr val="accent1"/>
-          </a:lnRef>
-          <a:fillRef idx="0">
-            <a:schemeClr val="accent1"/>
-          </a:fillRef>
-          <a:effectRef idx="1">
-            <a:schemeClr val="accent1"/>
-          </a:effectRef>
-          <a:fontRef idx="minor">
-            <a:schemeClr val="tx1"/>
-          </a:fontRef>
-        </p:style>
-      </p:cxnSp>
-      <p:cxnSp>
-        <p:nvCxnSpPr>
-          <p:cNvPr id="16" name="Regla Col 3"/>
-          <p:cNvCxnSpPr/>
-          <p:nvPr/>
-        </p:nvCxnSpPr>
-        <p:spPr>
-          <a:xfrm>
-            <a:off x="12362688" y="3383280"/>
-            <a:ext cx="5056632" cy="0"/>
-          </a:xfrm>
-          <a:prstGeom prst="line">
-            <a:avLst/>
-          </a:prstGeom>
-          <a:ln w="12700">
-            <a:solidFill>
-              <a:srgbClr val="D8D0C6"/>
-            </a:solidFill>
-          </a:ln>
-        </p:spPr>
-        <p:style>
-          <a:lnRef idx="2">
-            <a:schemeClr val="accent1"/>
-          </a:lnRef>
-          <a:fillRef idx="0">
-            <a:schemeClr val="accent1"/>
-          </a:fillRef>
-          <a:effectRef idx="1">
-            <a:schemeClr val="accent1"/>
-          </a:effectRef>
-          <a:fontRef idx="minor">
-            <a:schemeClr val="tx1"/>
-          </a:fontRef>
-        </p:style>
-      </p:cxnSp>
-      <p:sp>
-        <p:nvSpPr>
-          <p:cNvPr id="17" name="Barra Col 1"/>
-          <p:cNvSpPr/>
-          <p:nvPr/>
-        </p:nvSpPr>
-        <p:spPr>
-          <a:xfrm>
-            <a:off x="877824" y="3345180"/>
-            <a:ext cx="914400" cy="76200"/>
-          </a:xfrm>
-          <a:prstGeom prst="rect">
+        </p:spPr>
+        <p:txBody>
+          <a:bodyPr/>
+          <a:lstStyle/>
+          <a:p>
+            <a:endParaRPr lang="es-CO"/>
+          </a:p>
+        </p:txBody>
+      </p:sp>
+      <p:sp>
+        <p:nvSpPr>
+          <p:cNvPr id="18" name="Texto 1a"/>
+          <p:cNvSpPr/>
+          <p:nvPr/>
+        </p:nvSpPr>
+        <p:spPr>
+          <a:xfrm>
+            <a:off x="1485900" y="4663440"/>
+            <a:ext cx="4098036" cy="548640"/>
+          </a:xfrm>
+          <a:prstGeom prst="rect">
+            <a:avLst/>
+          </a:prstGeom>
+          <a:noFill/>
+          <a:ln/>
+        </p:spPr>
+        <p:txBody>
+          <a:bodyPr wrap="square" lIns="0" tIns="0" rIns="0" bIns="0" rtlCol="0"/>
+          <a:lstStyle/>
+          <a:p>
+            <a:r>
+              <a:rPr lang="es-CO" sz="2250" b="1">
+                <a:solidFill>
+                  <a:srgbClr val="07133D"/>
+                </a:solidFill>
+                <a:latin typeface="Roboto Condensed" panose="02000000000000000000" pitchFamily="2" charset="0"/>
+                <a:ea typeface="Roboto Condensed" panose="02000000000000000000" pitchFamily="2" charset="0"/>
+                <a:cs typeface="Roboto Condensed" panose="02000000000000000000" pitchFamily="2" charset="0"/>
+              </a:rPr>
+              <a:t>Alta carga en desarrollo y calidad</a:t>
+            </a:r>
+          </a:p>
+        </p:txBody>
+      </p:sp>
+      <p:sp>
+        <p:nvSpPr>
+          <p:cNvPr id="19" name="Punto 1b"/>
+          <p:cNvSpPr/>
+          <p:nvPr/>
+        </p:nvSpPr>
+        <p:spPr>
+          <a:xfrm>
+            <a:off x="1211580" y="6377940"/>
+            <a:ext cx="137160" cy="137160"/>
+          </a:xfrm>
+          <a:prstGeom prst="ellipse">
             <a:avLst/>
           </a:prstGeom>
           <a:solidFill>
-            <a:srgbClr val="A69C90"/>
+            <a:srgbClr val="2B4CD9"/>
           </a:solidFill>
           <a:ln>
             <a:noFill/>
           </a:ln>
-          <a:effectLst/>
-        </p:spPr>
-        <p:txBody>
-          <a:bodyPr rtlCol="0" anchor="ctr"/>
-          <a:lstStyle/>
-          <a:p>
-            <a:pPr algn="ctr"/>
-            <a:endParaRPr lang="es-CO" sz="1200"/>
-          </a:p>
-        </p:txBody>
-      </p:sp>
-      <p:sp>
-        <p:nvSpPr>
-          <p:cNvPr id="18" name="Barra Col 2"/>
-          <p:cNvSpPr/>
-          <p:nvPr/>
-        </p:nvSpPr>
-        <p:spPr>
-          <a:xfrm>
-            <a:off x="6620256" y="3345180"/>
-            <a:ext cx="914400" cy="76200"/>
-          </a:xfrm>
-          <a:prstGeom prst="rect">
+        </p:spPr>
+        <p:txBody>
+          <a:bodyPr/>
+          <a:lstStyle/>
+          <a:p>
+            <a:endParaRPr lang="es-CO"/>
+          </a:p>
+        </p:txBody>
+      </p:sp>
+      <p:sp>
+        <p:nvSpPr>
+          <p:cNvPr id="20" name="Texto 1b"/>
+          <p:cNvSpPr/>
+          <p:nvPr/>
+        </p:nvSpPr>
+        <p:spPr>
+          <a:xfrm>
+            <a:off x="1485900" y="6263640"/>
+            <a:ext cx="4098036" cy="548640"/>
+          </a:xfrm>
+          <a:prstGeom prst="rect">
+            <a:avLst/>
+          </a:prstGeom>
+          <a:noFill/>
+          <a:ln/>
+        </p:spPr>
+        <p:txBody>
+          <a:bodyPr wrap="square" lIns="0" tIns="0" rIns="0" bIns="0" rtlCol="0"/>
+          <a:lstStyle/>
+          <a:p>
+            <a:r>
+              <a:rPr lang="es-CO" sz="2250" b="1">
+                <a:solidFill>
+                  <a:srgbClr val="07133D"/>
+                </a:solidFill>
+                <a:latin typeface="Roboto Condensed" panose="02000000000000000000" pitchFamily="2" charset="0"/>
+                <a:ea typeface="Roboto Condensed" panose="02000000000000000000" pitchFamily="2" charset="0"/>
+                <a:cs typeface="Roboto Condensed" panose="02000000000000000000" pitchFamily="2" charset="0"/>
+              </a:rPr>
+              <a:t>IA en casos de uso puntuales</a:t>
+            </a:r>
+          </a:p>
+        </p:txBody>
+      </p:sp>
+      <p:sp>
+        <p:nvSpPr>
+          <p:cNvPr id="21" name="Punto 1c"/>
+          <p:cNvSpPr/>
+          <p:nvPr/>
+        </p:nvSpPr>
+        <p:spPr>
+          <a:xfrm>
+            <a:off x="1211580" y="7978140"/>
+            <a:ext cx="137160" cy="137160"/>
+          </a:xfrm>
+          <a:prstGeom prst="ellipse">
             <a:avLst/>
           </a:prstGeom>
           <a:solidFill>
-            <a:srgbClr val="111111"/>
+            <a:srgbClr val="2B4CD9"/>
           </a:solidFill>
           <a:ln>
             <a:noFill/>
           </a:ln>
-          <a:effectLst/>
-        </p:spPr>
-        <p:txBody>
-          <a:bodyPr rtlCol="0" anchor="ctr"/>
+        </p:spPr>
+        <p:txBody>
+          <a:bodyPr/>
+          <a:lstStyle/>
+          <a:p>
+            <a:endParaRPr lang="es-CO"/>
+          </a:p>
+        </p:txBody>
+      </p:sp>
+      <p:sp>
+        <p:nvSpPr>
+          <p:cNvPr id="22" name="Texto 1c"/>
+          <p:cNvSpPr/>
+          <p:nvPr/>
+        </p:nvSpPr>
+        <p:spPr>
+          <a:xfrm>
+            <a:off x="1485900" y="7863840"/>
+            <a:ext cx="4098036" cy="548640"/>
+          </a:xfrm>
+          <a:prstGeom prst="rect">
+            <a:avLst/>
+          </a:prstGeom>
+          <a:noFill/>
+          <a:ln/>
+        </p:spPr>
+        <p:txBody>
+          <a:bodyPr wrap="square" lIns="0" tIns="0" rIns="0" bIns="0" rtlCol="0"/>
+          <a:lstStyle/>
+          <a:p>
+            <a:r>
+              <a:rPr lang="es-CO" sz="2250" b="1">
+                <a:solidFill>
+                  <a:srgbClr val="07133D"/>
+                </a:solidFill>
+                <a:latin typeface="Roboto Condensed" panose="02000000000000000000" pitchFamily="2" charset="0"/>
+                <a:ea typeface="Roboto Condensed" panose="02000000000000000000" pitchFamily="2" charset="0"/>
+                <a:cs typeface="Roboto Condensed" panose="02000000000000000000" pitchFamily="2" charset="0"/>
+              </a:rPr>
+              <a:t>Impacto sin medir de punta a punta</a:t>
+            </a:r>
+          </a:p>
+        </p:txBody>
+      </p:sp>
+      <p:sp>
+        <p:nvSpPr>
+          <p:cNvPr id="23" name="KPI1 Num"/>
+          <p:cNvSpPr/>
+          <p:nvPr/>
+        </p:nvSpPr>
+        <p:spPr>
+          <a:xfrm>
+            <a:off x="6955536" y="4663440"/>
+            <a:ext cx="1371600" cy="685800"/>
+          </a:xfrm>
+          <a:prstGeom prst="rect">
+            <a:avLst/>
+          </a:prstGeom>
+          <a:noFill/>
+          <a:ln/>
+        </p:spPr>
+        <p:txBody>
+          <a:bodyPr wrap="square" lIns="0" tIns="0" rIns="0" bIns="0" rtlCol="0"/>
+          <a:lstStyle/>
+          <a:p>
+            <a:r>
+              <a:rPr lang="es-CO" sz="4200" b="1">
+                <a:solidFill>
+                  <a:srgbClr val="2B4CD9"/>
+                </a:solidFill>
+                <a:latin typeface="Roboto Condensed" panose="02000000000000000000" pitchFamily="2" charset="0"/>
+                <a:ea typeface="Roboto Condensed" panose="02000000000000000000" pitchFamily="2" charset="0"/>
+                <a:cs typeface="Roboto Condensed" panose="02000000000000000000" pitchFamily="2" charset="0"/>
+              </a:rPr>
+              <a:t>85</a:t>
+            </a:r>
+            <a:r>
+              <a:rPr lang="es-CO" sz="2100" b="1" baseline="28000">
+                <a:solidFill>
+                  <a:srgbClr val="2B4CD9"/>
+                </a:solidFill>
+                <a:latin typeface="Roboto Condensed" panose="02000000000000000000" pitchFamily="2" charset="0"/>
+                <a:ea typeface="Roboto Condensed" panose="02000000000000000000" pitchFamily="2" charset="0"/>
+                <a:cs typeface="Roboto Condensed" panose="02000000000000000000" pitchFamily="2" charset="0"/>
+              </a:rPr>
+              <a:t>%</a:t>
+            </a:r>
+          </a:p>
+        </p:txBody>
+      </p:sp>
+      <p:sp>
+        <p:nvSpPr>
+          <p:cNvPr id="24" name="KPI1 Label"/>
+          <p:cNvSpPr/>
+          <p:nvPr/>
+        </p:nvSpPr>
+        <p:spPr>
+          <a:xfrm>
+            <a:off x="8510016" y="4956048"/>
+            <a:ext cx="2817876" cy="329184"/>
+          </a:xfrm>
+          <a:prstGeom prst="rect">
+            <a:avLst/>
+          </a:prstGeom>
+          <a:noFill/>
+          <a:ln/>
+        </p:spPr>
+        <p:txBody>
+          <a:bodyPr wrap="square" lIns="0" tIns="0" rIns="0" bIns="0" rtlCol="0"/>
+          <a:lstStyle/>
+          <a:p>
+            <a:r>
+              <a:rPr lang="es-CO" sz="1800" b="1">
+                <a:solidFill>
+                  <a:srgbClr val="07133D"/>
+                </a:solidFill>
+                <a:latin typeface="Roboto Condensed" panose="02000000000000000000" pitchFamily="2" charset="0"/>
+                <a:ea typeface="Roboto Condensed" panose="02000000000000000000" pitchFamily="2" charset="0"/>
+                <a:cs typeface="Roboto Condensed" panose="02000000000000000000" pitchFamily="2" charset="0"/>
+              </a:rPr>
+              <a:t>Desarrollo</a:t>
+            </a:r>
+          </a:p>
+        </p:txBody>
+      </p:sp>
+      <p:sp>
+        <p:nvSpPr>
+          <p:cNvPr id="25" name="KPI1 Cap"/>
+          <p:cNvSpPr/>
+          <p:nvPr/>
+        </p:nvSpPr>
+        <p:spPr>
+          <a:xfrm>
+            <a:off x="8510016" y="5285232"/>
+            <a:ext cx="2817876" cy="384048"/>
+          </a:xfrm>
+          <a:prstGeom prst="rect">
+            <a:avLst/>
+          </a:prstGeom>
+          <a:noFill/>
+          <a:ln/>
+        </p:spPr>
+        <p:txBody>
+          <a:bodyPr wrap="square" lIns="0" tIns="0" rIns="0" bIns="0" rtlCol="0"/>
+          <a:lstStyle/>
+          <a:p>
+            <a:r>
+              <a:rPr lang="es-CO" sz="1500">
+                <a:solidFill>
+                  <a:srgbClr val="5B6880"/>
+                </a:solidFill>
+                <a:latin typeface="Roboto Condensed" panose="02000000000000000000" pitchFamily="2" charset="0"/>
+                <a:ea typeface="Roboto Condensed" panose="02000000000000000000" pitchFamily="2" charset="0"/>
+                <a:cs typeface="Roboto Condensed" panose="02000000000000000000" pitchFamily="2" charset="0"/>
+              </a:rPr>
+              <a:t>Desarrollo de componentes de la App</a:t>
+            </a:r>
+          </a:p>
+        </p:txBody>
+      </p:sp>
+      <p:sp>
+        <p:nvSpPr>
+          <p:cNvPr id="26" name="KPI2 Num"/>
+          <p:cNvSpPr/>
+          <p:nvPr/>
+        </p:nvSpPr>
+        <p:spPr>
+          <a:xfrm>
+            <a:off x="6955536" y="6263640"/>
+            <a:ext cx="1371600" cy="685800"/>
+          </a:xfrm>
+          <a:prstGeom prst="rect">
+            <a:avLst/>
+          </a:prstGeom>
+          <a:noFill/>
+          <a:ln/>
+        </p:spPr>
+        <p:txBody>
+          <a:bodyPr wrap="square" lIns="0" tIns="0" rIns="0" bIns="0" rtlCol="0"/>
+          <a:lstStyle/>
+          <a:p>
+            <a:r>
+              <a:rPr lang="es-CO" sz="4200" b="1">
+                <a:solidFill>
+                  <a:srgbClr val="2B4CD9"/>
+                </a:solidFill>
+                <a:latin typeface="Roboto Condensed" panose="02000000000000000000" pitchFamily="2" charset="0"/>
+                <a:ea typeface="Roboto Condensed" panose="02000000000000000000" pitchFamily="2" charset="0"/>
+                <a:cs typeface="Roboto Condensed" panose="02000000000000000000" pitchFamily="2" charset="0"/>
+              </a:rPr>
+              <a:t>66</a:t>
+            </a:r>
+            <a:r>
+              <a:rPr lang="es-CO" sz="2100" b="1" baseline="28000">
+                <a:solidFill>
+                  <a:srgbClr val="2B4CD9"/>
+                </a:solidFill>
+                <a:latin typeface="Roboto Condensed" panose="02000000000000000000" pitchFamily="2" charset="0"/>
+                <a:ea typeface="Roboto Condensed" panose="02000000000000000000" pitchFamily="2" charset="0"/>
+                <a:cs typeface="Roboto Condensed" panose="02000000000000000000" pitchFamily="2" charset="0"/>
+              </a:rPr>
+              <a:t>%</a:t>
+            </a:r>
+          </a:p>
+        </p:txBody>
+      </p:sp>
+      <p:sp>
+        <p:nvSpPr>
+          <p:cNvPr id="27" name="KPI2 Label"/>
+          <p:cNvSpPr/>
+          <p:nvPr/>
+        </p:nvSpPr>
+        <p:spPr>
+          <a:xfrm>
+            <a:off x="8510016" y="6556248"/>
+            <a:ext cx="2817876" cy="329184"/>
+          </a:xfrm>
+          <a:prstGeom prst="rect">
+            <a:avLst/>
+          </a:prstGeom>
+          <a:noFill/>
+          <a:ln/>
+        </p:spPr>
+        <p:txBody>
+          <a:bodyPr wrap="square" lIns="0" tIns="0" rIns="0" bIns="0" rtlCol="0"/>
+          <a:lstStyle/>
+          <a:p>
+            <a:r>
+              <a:rPr lang="es-CO" sz="1800" b="1">
+                <a:solidFill>
+                  <a:srgbClr val="07133D"/>
+                </a:solidFill>
+                <a:latin typeface="Roboto Condensed" panose="02000000000000000000" pitchFamily="2" charset="0"/>
+                <a:ea typeface="Roboto Condensed" panose="02000000000000000000" pitchFamily="2" charset="0"/>
+                <a:cs typeface="Roboto Condensed" panose="02000000000000000000" pitchFamily="2" charset="0"/>
+              </a:rPr>
+              <a:t>Calidad</a:t>
+            </a:r>
+          </a:p>
+        </p:txBody>
+      </p:sp>
+      <p:sp>
+        <p:nvSpPr>
+          <p:cNvPr id="28" name="KPI2 Cap"/>
+          <p:cNvSpPr/>
+          <p:nvPr/>
+        </p:nvSpPr>
+        <p:spPr>
+          <a:xfrm>
+            <a:off x="8510016" y="6885432"/>
+            <a:ext cx="2817876" cy="384048"/>
+          </a:xfrm>
+          <a:prstGeom prst="rect">
+            <a:avLst/>
+          </a:prstGeom>
+          <a:noFill/>
+          <a:ln/>
+        </p:spPr>
+        <p:txBody>
+          <a:bodyPr wrap="square" lIns="0" tIns="0" rIns="0" bIns="0" rtlCol="0"/>
+          <a:lstStyle/>
+          <a:p>
+            <a:r>
+              <a:rPr lang="es-CO" sz="1500">
+                <a:solidFill>
+                  <a:srgbClr val="5B6880"/>
+                </a:solidFill>
+                <a:latin typeface="Roboto Condensed" panose="02000000000000000000" pitchFamily="2" charset="0"/>
+                <a:ea typeface="Roboto Condensed" panose="02000000000000000000" pitchFamily="2" charset="0"/>
+                <a:cs typeface="Roboto Condensed" panose="02000000000000000000" pitchFamily="2" charset="0"/>
+              </a:rPr>
+              <a:t>Diseño y automatización de pruebas</a:t>
+            </a:r>
+          </a:p>
+        </p:txBody>
+      </p:sp>
+      <p:sp>
+        <p:nvSpPr>
+          <p:cNvPr id="29" name="KPI3 Num"/>
+          <p:cNvSpPr/>
+          <p:nvPr/>
+        </p:nvSpPr>
+        <p:spPr>
+          <a:xfrm>
+            <a:off x="6955536" y="7863840"/>
+            <a:ext cx="1371600" cy="685800"/>
+          </a:xfrm>
+          <a:prstGeom prst="rect">
+            <a:avLst/>
+          </a:prstGeom>
+          <a:noFill/>
+          <a:ln/>
+        </p:spPr>
+        <p:txBody>
+          <a:bodyPr wrap="square" lIns="0" tIns="0" rIns="0" bIns="0" rtlCol="0"/>
+          <a:lstStyle/>
+          <a:p>
+            <a:r>
+              <a:rPr lang="es-CO" sz="4200" b="1">
+                <a:solidFill>
+                  <a:srgbClr val="2B4CD9"/>
+                </a:solidFill>
+                <a:latin typeface="Roboto Condensed" panose="02000000000000000000" pitchFamily="2" charset="0"/>
+                <a:ea typeface="Roboto Condensed" panose="02000000000000000000" pitchFamily="2" charset="0"/>
+                <a:cs typeface="Roboto Condensed" panose="02000000000000000000" pitchFamily="2" charset="0"/>
+              </a:rPr>
+              <a:t>95</a:t>
+            </a:r>
+            <a:r>
+              <a:rPr lang="es-CO" sz="2100" b="1" baseline="28000">
+                <a:solidFill>
+                  <a:srgbClr val="2B4CD9"/>
+                </a:solidFill>
+                <a:latin typeface="Roboto Condensed" panose="02000000000000000000" pitchFamily="2" charset="0"/>
+                <a:ea typeface="Roboto Condensed" panose="02000000000000000000" pitchFamily="2" charset="0"/>
+                <a:cs typeface="Roboto Condensed" panose="02000000000000000000" pitchFamily="2" charset="0"/>
+              </a:rPr>
+              <a:t>%</a:t>
+            </a:r>
+          </a:p>
+        </p:txBody>
+      </p:sp>
+      <p:sp>
+        <p:nvSpPr>
+          <p:cNvPr id="30" name="KPI3 Label"/>
+          <p:cNvSpPr/>
+          <p:nvPr/>
+        </p:nvSpPr>
+        <p:spPr>
+          <a:xfrm>
+            <a:off x="8510016" y="8156448"/>
+            <a:ext cx="2817876" cy="329184"/>
+          </a:xfrm>
+          <a:prstGeom prst="rect">
+            <a:avLst/>
+          </a:prstGeom>
+          <a:noFill/>
+          <a:ln/>
+        </p:spPr>
+        <p:txBody>
+          <a:bodyPr wrap="square" lIns="0" tIns="0" rIns="0" bIns="0" rtlCol="0"/>
+          <a:lstStyle/>
+          <a:p>
+            <a:r>
+              <a:rPr lang="es-CO" sz="1800" b="1">
+                <a:solidFill>
+                  <a:srgbClr val="07133D"/>
+                </a:solidFill>
+                <a:latin typeface="Roboto Condensed" panose="02000000000000000000" pitchFamily="2" charset="0"/>
+                <a:ea typeface="Roboto Condensed" panose="02000000000000000000" pitchFamily="2" charset="0"/>
+                <a:cs typeface="Roboto Condensed" panose="02000000000000000000" pitchFamily="2" charset="0"/>
+              </a:rPr>
+              <a:t>Obsolescencia Tecnológica</a:t>
+            </a:r>
+          </a:p>
+        </p:txBody>
+      </p:sp>
+      <p:sp>
+        <p:nvSpPr>
+          <p:cNvPr id="31" name="KPI3 Cap"/>
+          <p:cNvSpPr/>
+          <p:nvPr/>
+        </p:nvSpPr>
+        <p:spPr>
+          <a:xfrm>
+            <a:off x="8510016" y="8485632"/>
+            <a:ext cx="2817876" cy="384048"/>
+          </a:xfrm>
+          <a:prstGeom prst="rect">
+            <a:avLst/>
+          </a:prstGeom>
+          <a:noFill/>
+          <a:ln/>
+        </p:spPr>
+        <p:txBody>
+          <a:bodyPr wrap="square" lIns="0" tIns="0" rIns="0" bIns="0" rtlCol="0"/>
+          <a:lstStyle/>
+          <a:p>
+            <a:r>
+              <a:rPr lang="es-CO" sz="1500">
+                <a:solidFill>
+                  <a:srgbClr val="5B6880"/>
+                </a:solidFill>
+                <a:latin typeface="Roboto Condensed" panose="02000000000000000000" pitchFamily="2" charset="0"/>
+                <a:ea typeface="Roboto Condensed" panose="02000000000000000000" pitchFamily="2" charset="0"/>
+                <a:cs typeface="Roboto Condensed" panose="02000000000000000000" pitchFamily="2" charset="0"/>
+              </a:rPr>
+              <a:t>Migración de APIs</a:t>
+            </a:r>
+          </a:p>
+        </p:txBody>
+      </p:sp>
+      <p:sp>
+        <p:nvSpPr>
+          <p:cNvPr id="32" name="Pill Meta"/>
+          <p:cNvSpPr/>
+          <p:nvPr/>
+        </p:nvSpPr>
+        <p:spPr>
+          <a:xfrm>
+            <a:off x="12699492" y="4663440"/>
+            <a:ext cx="1371600" cy="466344"/>
+          </a:xfrm>
+          <a:prstGeom prst="roundRect">
+            <a:avLst>
+              <a:gd name="adj" fmla="val 23529"/>
+            </a:avLst>
+          </a:prstGeom>
+          <a:solidFill>
+            <a:srgbClr val="2B4CD9"/>
+          </a:solidFill>
+          <a:ln w="12700">
+            <a:solidFill>
+              <a:srgbClr val="2B4CD9"/>
+            </a:solidFill>
+            <a:prstDash val="solid"/>
+          </a:ln>
+          <a:effectLst>
+            <a:outerShdw blurRad="12700" dist="5080" dir="2700000" algn="bl" rotWithShape="0">
+              <a:srgbClr val="000000">
+                <a:alpha val="12000"/>
+              </a:srgbClr>
+            </a:outerShdw>
+          </a:effectLst>
+        </p:spPr>
+        <p:txBody>
+          <a:bodyPr/>
+          <a:lstStyle/>
+          <a:p>
+            <a:endParaRPr lang="es-CO"/>
+          </a:p>
+        </p:txBody>
+      </p:sp>
+      <p:sp>
+        <p:nvSpPr>
+          <p:cNvPr id="33" name="Pill Meta Texto"/>
+          <p:cNvSpPr/>
+          <p:nvPr/>
+        </p:nvSpPr>
+        <p:spPr>
+          <a:xfrm>
+            <a:off x="12809220" y="4773168"/>
+            <a:ext cx="1152144" cy="246888"/>
+          </a:xfrm>
+          <a:prstGeom prst="rect">
+            <a:avLst/>
+          </a:prstGeom>
+          <a:noFill/>
+          <a:ln/>
+        </p:spPr>
+        <p:txBody>
+          <a:bodyPr wrap="square" lIns="0" tIns="0" rIns="0" bIns="0" rtlCol="0" anchor="ctr"/>
           <a:lstStyle/>
           <a:p>
             <a:pPr algn="ctr"/>
-            <a:endParaRPr lang="es-CO" sz="1200"/>
-          </a:p>
-        </p:txBody>
-      </p:sp>
-      <p:sp>
-        <p:nvSpPr>
-          <p:cNvPr id="19" name="Barra Col 3"/>
-          <p:cNvSpPr/>
-          <p:nvPr/>
-        </p:nvSpPr>
-        <p:spPr>
-          <a:xfrm>
-            <a:off x="12362688" y="3345180"/>
-            <a:ext cx="914400" cy="76200"/>
-          </a:xfrm>
-          <a:prstGeom prst="rect">
-            <a:avLst/>
-          </a:prstGeom>
-          <a:solidFill>
-            <a:srgbClr val="EE1C25"/>
-          </a:solidFill>
-          <a:ln>
-            <a:noFill/>
-          </a:ln>
-          <a:effectLst/>
-        </p:spPr>
-        <p:txBody>
-          <a:bodyPr rtlCol="0" anchor="ctr"/>
-          <a:lstStyle/>
-          <a:p>
-            <a:pPr algn="ctr"/>
-            <a:endParaRPr lang="es-CO" sz="1200"/>
-          </a:p>
-        </p:txBody>
-      </p:sp>
-      <p:sp>
-        <p:nvSpPr>
-          <p:cNvPr id="20" name="Titular Col 1"/>
-          <p:cNvSpPr txBox="1"/>
-          <p:nvPr/>
-        </p:nvSpPr>
-        <p:spPr>
-          <a:xfrm>
-            <a:off x="877824" y="3566160"/>
-            <a:ext cx="5056632" cy="1188720"/>
-          </a:xfrm>
-          <a:prstGeom prst="rect">
-            <a:avLst/>
-          </a:prstGeom>
-          <a:noFill/>
+            <a:r>
+              <a:rPr lang="es-CO" sz="1800" b="1">
+                <a:solidFill>
+                  <a:srgbClr val="FFFFFF"/>
+                </a:solidFill>
+                <a:latin typeface="Roboto Condensed" panose="02000000000000000000" pitchFamily="2" charset="0"/>
+                <a:ea typeface="Roboto Condensed" panose="02000000000000000000" pitchFamily="2" charset="0"/>
+                <a:cs typeface="Roboto Condensed" panose="02000000000000000000" pitchFamily="2" charset="0"/>
+              </a:rPr>
+              <a:t>META</a:t>
+            </a:r>
+          </a:p>
+        </p:txBody>
+      </p:sp>
+      <p:sp>
+        <p:nvSpPr>
+          <p:cNvPr id="34" name="Hero Meta"/>
+          <p:cNvSpPr/>
+          <p:nvPr/>
+        </p:nvSpPr>
+        <p:spPr>
+          <a:xfrm>
+            <a:off x="12699492" y="5303520"/>
+            <a:ext cx="4372356" cy="1600200"/>
+          </a:xfrm>
+          <a:prstGeom prst="rect">
+            <a:avLst/>
+          </a:prstGeom>
+          <a:noFill/>
+          <a:ln/>
         </p:spPr>
         <p:txBody>
           <a:bodyPr wrap="square" lIns="0" tIns="0" rIns="0" bIns="0" rtlCol="0">
@@ -1835,38 +2392,82 @@
           </a:bodyPr>
           <a:lstStyle/>
           <a:p>
-            <a:pPr>
-              <a:lnSpc>
-                <a:spcPct val="90000"/>
-              </a:lnSpc>
-            </a:pPr>
-            <a:r>
-              <a:rPr lang="es-CO" sz="2700" b="1" dirty="0">
-                <a:solidFill>
-                  <a:srgbClr val="111111"/>
-                </a:solidFill>
-                <a:latin typeface="Segoe UI" panose="020B0502040204020203" pitchFamily="34" charset="0"/>
-              </a:rPr>
-              <a:t>El ciclo depende del esfuerzo manual</a:t>
-            </a:r>
-          </a:p>
-        </p:txBody>
-      </p:sp>
-      <p:sp>
-        <p:nvSpPr>
-          <p:cNvPr id="21" name="Titular Col 2"/>
-          <p:cNvSpPr txBox="1"/>
-          <p:nvPr/>
-        </p:nvSpPr>
-        <p:spPr>
-          <a:xfrm>
-            <a:off x="6620256" y="3566160"/>
-            <a:ext cx="5056632" cy="1188720"/>
-          </a:xfrm>
-          <a:prstGeom prst="rect">
-            <a:avLst/>
-          </a:prstGeom>
-          <a:noFill/>
+            <a:r>
+              <a:rPr lang="es-CO" sz="10500" b="1">
+                <a:solidFill>
+                  <a:srgbClr val="2B4CD9"/>
+                </a:solidFill>
+                <a:latin typeface="Roboto Condensed" panose="02000000000000000000" pitchFamily="2" charset="0"/>
+                <a:ea typeface="Roboto Condensed" panose="02000000000000000000" pitchFamily="2" charset="0"/>
+                <a:cs typeface="Roboto Condensed" panose="02000000000000000000" pitchFamily="2" charset="0"/>
+              </a:rPr>
+              <a:t>50</a:t>
+            </a:r>
+            <a:r>
+              <a:rPr lang="es-CO" sz="4200" b="1" baseline="28000">
+                <a:solidFill>
+                  <a:srgbClr val="2B4CD9"/>
+                </a:solidFill>
+                <a:latin typeface="Roboto Condensed" panose="02000000000000000000" pitchFamily="2" charset="0"/>
+                <a:ea typeface="Roboto Condensed" panose="02000000000000000000" pitchFamily="2" charset="0"/>
+                <a:cs typeface="Roboto Condensed" panose="02000000000000000000" pitchFamily="2" charset="0"/>
+              </a:rPr>
+              <a:t>%</a:t>
+            </a:r>
+          </a:p>
+        </p:txBody>
+      </p:sp>
+      <p:sp>
+        <p:nvSpPr>
+          <p:cNvPr id="35" name="Caption Meta"/>
+          <p:cNvSpPr/>
+          <p:nvPr/>
+        </p:nvSpPr>
+        <p:spPr>
+          <a:xfrm>
+            <a:off x="12699492" y="6949440"/>
+            <a:ext cx="4372356" cy="384048"/>
+          </a:xfrm>
+          <a:prstGeom prst="rect">
+            <a:avLst/>
+          </a:prstGeom>
+          <a:noFill/>
+          <a:ln/>
+        </p:spPr>
+        <p:txBody>
+          <a:bodyPr wrap="square" lIns="0" tIns="0" rIns="0" bIns="0" rtlCol="0"/>
+          <a:lstStyle/>
+          <a:p>
+            <a:r>
+              <a:rPr lang="es-CO" sz="1500">
+                <a:solidFill>
+                  <a:srgbClr val="5B6880"/>
+                </a:solidFill>
+                <a:latin typeface="Roboto Condensed" panose="02000000000000000000" pitchFamily="2" charset="0"/>
+                <a:ea typeface="Roboto Condensed" panose="02000000000000000000" pitchFamily="2" charset="0"/>
+                <a:cs typeface="Roboto Condensed" panose="02000000000000000000" pitchFamily="2" charset="0"/>
+              </a:rPr>
+              <a:t>Reducción de esfuerzo en Desarrollo y Calidad</a:t>
+            </a:r>
+          </a:p>
+        </p:txBody>
+      </p:sp>
+      <p:sp>
+        <p:nvSpPr>
+          <p:cNvPr id="36" name="Cuerpo Col 3"/>
+          <p:cNvSpPr/>
+          <p:nvPr/>
+        </p:nvSpPr>
+        <p:spPr>
+          <a:xfrm>
+            <a:off x="12699492" y="7863840"/>
+            <a:ext cx="4372356" cy="1097280"/>
+          </a:xfrm>
+          <a:prstGeom prst="rect">
+            <a:avLst/>
+          </a:prstGeom>
+          <a:noFill/>
+          <a:ln/>
         </p:spPr>
         <p:txBody>
           <a:bodyPr wrap="square" lIns="0" tIns="0" rIns="0" bIns="0" rtlCol="0">
@@ -1874,932 +2475,77 @@
           </a:bodyPr>
           <a:lstStyle/>
           <a:p>
-            <a:pPr>
-              <a:lnSpc>
-                <a:spcPct val="90000"/>
-              </a:lnSpc>
-            </a:pPr>
-            <a:r>
-              <a:rPr lang="es-CO" sz="2700" b="1" dirty="0">
-                <a:solidFill>
-                  <a:srgbClr val="111111"/>
-                </a:solidFill>
-                <a:latin typeface="Segoe UI" panose="020B0502040204020203" pitchFamily="34" charset="0"/>
-              </a:rPr>
-              <a:t>La prueba de concepto ya cuantifica el ahorro</a:t>
-            </a:r>
-          </a:p>
-        </p:txBody>
-      </p:sp>
-      <p:sp>
-        <p:nvSpPr>
-          <p:cNvPr id="22" name="Titular Col 3"/>
-          <p:cNvSpPr txBox="1"/>
-          <p:nvPr/>
-        </p:nvSpPr>
-        <p:spPr>
-          <a:xfrm>
-            <a:off x="12362688" y="3566160"/>
-            <a:ext cx="5056632" cy="1188720"/>
-          </a:xfrm>
-          <a:prstGeom prst="rect">
-            <a:avLst/>
-          </a:prstGeom>
-          <a:noFill/>
-        </p:spPr>
-        <p:txBody>
-          <a:bodyPr wrap="square" lIns="0" tIns="0" rIns="0" bIns="0" rtlCol="0">
-            <a:noAutofit/>
-          </a:bodyPr>
-          <a:lstStyle/>
-          <a:p>
-            <a:pPr>
-              <a:lnSpc>
-                <a:spcPct val="90000"/>
-              </a:lnSpc>
-            </a:pPr>
-            <a:r>
-              <a:rPr lang="es-CO" sz="2700" b="1" dirty="0">
-                <a:solidFill>
-                  <a:srgbClr val="111111"/>
-                </a:solidFill>
-                <a:latin typeface="Segoe UI" panose="020B0502040204020203" pitchFamily="34" charset="0"/>
-              </a:rPr>
-              <a:t>Piloto con </a:t>
-            </a:r>
-            <a:r>
-              <a:rPr lang="es-CO" sz="2700" b="1" dirty="0">
-                <a:solidFill>
-                  <a:srgbClr val="EE1C25"/>
-                </a:solidFill>
-                <a:latin typeface="Segoe UI" panose="020B0502040204020203" pitchFamily="34" charset="0"/>
-              </a:rPr>
-              <a:t>Células</a:t>
-            </a:r>
-            <a:r>
-              <a:rPr lang="es-CO" sz="2700" b="1" dirty="0">
-                <a:solidFill>
-                  <a:srgbClr val="111111"/>
-                </a:solidFill>
-                <a:latin typeface="Segoe UI" panose="020B0502040204020203" pitchFamily="34" charset="0"/>
-              </a:rPr>
-              <a:t> para escalar el impacto</a:t>
-            </a:r>
-          </a:p>
-        </p:txBody>
-      </p:sp>
-      <p:sp>
-        <p:nvSpPr>
-          <p:cNvPr id="23" name="C1 Marca 1"/>
-          <p:cNvSpPr/>
-          <p:nvPr/>
-        </p:nvSpPr>
-        <p:spPr>
-          <a:xfrm>
-            <a:off x="877824" y="5056632"/>
-            <a:ext cx="274320" cy="38100"/>
-          </a:xfrm>
-          <a:prstGeom prst="rect">
-            <a:avLst/>
-          </a:prstGeom>
-          <a:solidFill>
-            <a:srgbClr val="FF0000"/>
-          </a:solidFill>
-          <a:ln>
-            <a:noFill/>
-          </a:ln>
-          <a:effectLst/>
-        </p:spPr>
-        <p:txBody>
-          <a:bodyPr rtlCol="0" anchor="ctr"/>
-          <a:lstStyle/>
-          <a:p>
-            <a:pPr algn="ctr"/>
-            <a:endParaRPr lang="es-CO" sz="1200"/>
-          </a:p>
-        </p:txBody>
-      </p:sp>
-      <p:sp>
-        <p:nvSpPr>
-          <p:cNvPr id="24" name="C1 Punto 1"/>
-          <p:cNvSpPr txBox="1"/>
-          <p:nvPr/>
-        </p:nvSpPr>
-        <p:spPr>
-          <a:xfrm>
-            <a:off x="877824" y="5285232"/>
-            <a:ext cx="5056632" cy="685800"/>
-          </a:xfrm>
-          <a:prstGeom prst="rect">
-            <a:avLst/>
-          </a:prstGeom>
-          <a:noFill/>
-        </p:spPr>
-        <p:txBody>
-          <a:bodyPr wrap="square" lIns="0" tIns="0" rIns="0" bIns="0" rtlCol="0">
-            <a:noAutofit/>
-          </a:bodyPr>
-          <a:lstStyle/>
-          <a:p>
-            <a:pPr>
-              <a:lnSpc>
-                <a:spcPct val="90000"/>
-              </a:lnSpc>
-            </a:pPr>
-            <a:r>
-              <a:rPr lang="es-CO" sz="2100" b="1" dirty="0">
-                <a:solidFill>
-                  <a:srgbClr val="111111"/>
-                </a:solidFill>
-                <a:latin typeface="Segoe UI" panose="020B0502040204020203" pitchFamily="34" charset="0"/>
-              </a:rPr>
-              <a:t>Alta carga en desarrollo y calidad</a:t>
-            </a:r>
-          </a:p>
-        </p:txBody>
-      </p:sp>
-      <p:sp>
-        <p:nvSpPr>
-          <p:cNvPr id="25" name="C1 Marca 2"/>
-          <p:cNvSpPr/>
-          <p:nvPr/>
-        </p:nvSpPr>
-        <p:spPr>
-          <a:xfrm>
-            <a:off x="877824" y="6565392"/>
-            <a:ext cx="274320" cy="38100"/>
-          </a:xfrm>
-          <a:prstGeom prst="rect">
-            <a:avLst/>
-          </a:prstGeom>
-          <a:solidFill>
-            <a:srgbClr val="FF0000"/>
-          </a:solidFill>
-          <a:ln>
-            <a:noFill/>
-          </a:ln>
-          <a:effectLst/>
-        </p:spPr>
-        <p:txBody>
-          <a:bodyPr rtlCol="0" anchor="ctr"/>
-          <a:lstStyle/>
-          <a:p>
-            <a:pPr algn="ctr"/>
-            <a:endParaRPr lang="es-CO" sz="1200"/>
-          </a:p>
-        </p:txBody>
-      </p:sp>
-      <p:sp>
-        <p:nvSpPr>
-          <p:cNvPr id="26" name="C1 Punto 2"/>
-          <p:cNvSpPr txBox="1"/>
-          <p:nvPr/>
-        </p:nvSpPr>
-        <p:spPr>
-          <a:xfrm>
-            <a:off x="877824" y="6793992"/>
-            <a:ext cx="5056632" cy="685800"/>
-          </a:xfrm>
-          <a:prstGeom prst="rect">
-            <a:avLst/>
-          </a:prstGeom>
-          <a:noFill/>
-        </p:spPr>
-        <p:txBody>
-          <a:bodyPr wrap="square" lIns="0" tIns="0" rIns="0" bIns="0" rtlCol="0">
-            <a:noAutofit/>
-          </a:bodyPr>
-          <a:lstStyle/>
-          <a:p>
-            <a:pPr>
-              <a:lnSpc>
-                <a:spcPct val="90000"/>
-              </a:lnSpc>
-            </a:pPr>
-            <a:r>
-              <a:rPr lang="es-CO" sz="2100" b="1" dirty="0">
-                <a:solidFill>
-                  <a:srgbClr val="111111"/>
-                </a:solidFill>
-                <a:latin typeface="Segoe UI" panose="020B0502040204020203" pitchFamily="34" charset="0"/>
-              </a:rPr>
-              <a:t>IA en casos de uso puntuales</a:t>
-            </a:r>
-          </a:p>
-        </p:txBody>
-      </p:sp>
-      <p:sp>
-        <p:nvSpPr>
-          <p:cNvPr id="27" name="C1 Marca 3"/>
-          <p:cNvSpPr/>
-          <p:nvPr/>
-        </p:nvSpPr>
-        <p:spPr>
-          <a:xfrm>
-            <a:off x="877824" y="8074152"/>
-            <a:ext cx="274320" cy="38100"/>
-          </a:xfrm>
-          <a:prstGeom prst="rect">
-            <a:avLst/>
-          </a:prstGeom>
-          <a:solidFill>
-            <a:srgbClr val="FF0000"/>
-          </a:solidFill>
-          <a:ln>
-            <a:noFill/>
-          </a:ln>
-          <a:effectLst/>
-        </p:spPr>
-        <p:txBody>
-          <a:bodyPr rtlCol="0" anchor="ctr"/>
-          <a:lstStyle/>
-          <a:p>
-            <a:pPr algn="ctr"/>
-            <a:endParaRPr lang="es-CO" sz="1200"/>
-          </a:p>
-        </p:txBody>
-      </p:sp>
-      <p:sp>
-        <p:nvSpPr>
-          <p:cNvPr id="28" name="C1 Punto 3"/>
-          <p:cNvSpPr txBox="1"/>
-          <p:nvPr/>
-        </p:nvSpPr>
-        <p:spPr>
-          <a:xfrm>
-            <a:off x="877824" y="8302752"/>
-            <a:ext cx="5056632" cy="685800"/>
-          </a:xfrm>
-          <a:prstGeom prst="rect">
-            <a:avLst/>
-          </a:prstGeom>
-          <a:noFill/>
-        </p:spPr>
-        <p:txBody>
-          <a:bodyPr wrap="square" lIns="0" tIns="0" rIns="0" bIns="0" rtlCol="0">
-            <a:noAutofit/>
-          </a:bodyPr>
-          <a:lstStyle/>
-          <a:p>
-            <a:pPr>
-              <a:lnSpc>
-                <a:spcPct val="90000"/>
-              </a:lnSpc>
-            </a:pPr>
-            <a:r>
-              <a:rPr lang="es-CO" sz="2100" b="1" dirty="0">
-                <a:solidFill>
-                  <a:srgbClr val="111111"/>
-                </a:solidFill>
-                <a:latin typeface="Segoe UI" panose="020B0502040204020203" pitchFamily="34" charset="0"/>
-              </a:rPr>
-              <a:t>Impacto sin medir de punta a punta</a:t>
-            </a:r>
-          </a:p>
-        </p:txBody>
-      </p:sp>
-      <p:sp>
-        <p:nvSpPr>
-          <p:cNvPr id="29" name="C2 KPI1 Num"/>
-          <p:cNvSpPr txBox="1"/>
-          <p:nvPr/>
-        </p:nvSpPr>
-        <p:spPr>
-          <a:xfrm>
-            <a:off x="6620256" y="5029200"/>
-            <a:ext cx="1417320" cy="658368"/>
-          </a:xfrm>
-          <a:prstGeom prst="rect">
-            <a:avLst/>
-          </a:prstGeom>
-          <a:noFill/>
-        </p:spPr>
-        <p:txBody>
-          <a:bodyPr wrap="square" lIns="0" tIns="0" rIns="0" bIns="0" rtlCol="0">
-            <a:noAutofit/>
-          </a:bodyPr>
-          <a:lstStyle/>
-          <a:p>
-            <a:r>
-              <a:rPr lang="es-CO" sz="3900" b="1" dirty="0">
-                <a:solidFill>
-                  <a:srgbClr val="EE1C25"/>
-                </a:solidFill>
-                <a:latin typeface="Segoe UI" panose="020B0502040204020203" pitchFamily="34" charset="0"/>
-              </a:rPr>
-              <a:t>85</a:t>
-            </a:r>
-            <a:r>
-              <a:rPr lang="es-CO" sz="1950" b="1" baseline="28000" dirty="0">
-                <a:solidFill>
-                  <a:srgbClr val="EE1C25"/>
-                </a:solidFill>
-                <a:latin typeface="Segoe UI" panose="020B0502040204020203" pitchFamily="34" charset="0"/>
-              </a:rPr>
-              <a:t>%</a:t>
-            </a:r>
-          </a:p>
-        </p:txBody>
-      </p:sp>
-      <p:sp>
-        <p:nvSpPr>
-          <p:cNvPr id="30" name="C2 KPI1 Label"/>
-          <p:cNvSpPr txBox="1"/>
-          <p:nvPr/>
-        </p:nvSpPr>
-        <p:spPr>
-          <a:xfrm>
-            <a:off x="8037576" y="5285232"/>
-            <a:ext cx="3639312" cy="329184"/>
-          </a:xfrm>
-          <a:prstGeom prst="rect">
-            <a:avLst/>
-          </a:prstGeom>
-          <a:noFill/>
-        </p:spPr>
-        <p:txBody>
-          <a:bodyPr wrap="square" lIns="0" tIns="0" rIns="0" bIns="0" rtlCol="0">
-            <a:noAutofit/>
-          </a:bodyPr>
-          <a:lstStyle/>
-          <a:p>
-            <a:r>
-              <a:rPr lang="es-CO" sz="1800" b="1" dirty="0">
-                <a:solidFill>
-                  <a:srgbClr val="111111"/>
-                </a:solidFill>
-                <a:latin typeface="Segoe UI" panose="020B0502040204020203" pitchFamily="34" charset="0"/>
-              </a:rPr>
-              <a:t>Desarrollo</a:t>
-            </a:r>
-          </a:p>
-        </p:txBody>
-      </p:sp>
-      <p:sp>
-        <p:nvSpPr>
-          <p:cNvPr id="31" name="C2 KPI1 Cap"/>
-          <p:cNvSpPr txBox="1"/>
-          <p:nvPr/>
-        </p:nvSpPr>
-        <p:spPr>
-          <a:xfrm>
-            <a:off x="8037576" y="5614416"/>
-            <a:ext cx="3639312" cy="594360"/>
-          </a:xfrm>
-          <a:prstGeom prst="rect">
-            <a:avLst/>
-          </a:prstGeom>
-          <a:noFill/>
-        </p:spPr>
-        <p:txBody>
-          <a:bodyPr wrap="square" lIns="0" tIns="0" rIns="0" bIns="0" rtlCol="0">
-            <a:noAutofit/>
-          </a:bodyPr>
-          <a:lstStyle/>
-          <a:p>
-            <a:pPr>
-              <a:lnSpc>
-                <a:spcPct val="95000"/>
-              </a:lnSpc>
-            </a:pPr>
-            <a:r>
-              <a:rPr lang="es-CO" sz="1350" dirty="0">
-                <a:solidFill>
-                  <a:srgbClr val="3A342E"/>
-                </a:solidFill>
-                <a:latin typeface="Segoe UI" panose="020B0502040204020203" pitchFamily="34" charset="0"/>
-              </a:rPr>
-              <a:t>Desarrollo de componentes de la App</a:t>
-            </a:r>
-          </a:p>
-        </p:txBody>
-      </p:sp>
-      <p:sp>
-        <p:nvSpPr>
-          <p:cNvPr id="32" name="C2 KPI2 Num"/>
-          <p:cNvSpPr txBox="1"/>
-          <p:nvPr/>
-        </p:nvSpPr>
-        <p:spPr>
-          <a:xfrm>
-            <a:off x="6620256" y="6537960"/>
-            <a:ext cx="1417320" cy="658368"/>
-          </a:xfrm>
-          <a:prstGeom prst="rect">
-            <a:avLst/>
-          </a:prstGeom>
-          <a:noFill/>
-        </p:spPr>
-        <p:txBody>
-          <a:bodyPr wrap="square" lIns="0" tIns="0" rIns="0" bIns="0" rtlCol="0">
-            <a:noAutofit/>
-          </a:bodyPr>
-          <a:lstStyle/>
-          <a:p>
-            <a:r>
-              <a:rPr lang="es-CO" sz="3900" b="1" dirty="0">
-                <a:solidFill>
-                  <a:srgbClr val="EE1C25"/>
-                </a:solidFill>
-                <a:latin typeface="Segoe UI" panose="020B0502040204020203" pitchFamily="34" charset="0"/>
-              </a:rPr>
-              <a:t>66</a:t>
-            </a:r>
-            <a:r>
-              <a:rPr lang="es-CO" sz="1950" b="1" baseline="28000" dirty="0">
-                <a:solidFill>
-                  <a:srgbClr val="EE1C25"/>
-                </a:solidFill>
-                <a:latin typeface="Segoe UI" panose="020B0502040204020203" pitchFamily="34" charset="0"/>
-              </a:rPr>
-              <a:t>%</a:t>
-            </a:r>
-          </a:p>
-        </p:txBody>
-      </p:sp>
-      <p:sp>
-        <p:nvSpPr>
-          <p:cNvPr id="33" name="C2 KPI2 Label"/>
-          <p:cNvSpPr txBox="1"/>
-          <p:nvPr/>
-        </p:nvSpPr>
-        <p:spPr>
-          <a:xfrm>
-            <a:off x="8037576" y="6793992"/>
-            <a:ext cx="3639312" cy="329184"/>
-          </a:xfrm>
-          <a:prstGeom prst="rect">
-            <a:avLst/>
-          </a:prstGeom>
-          <a:noFill/>
-        </p:spPr>
-        <p:txBody>
-          <a:bodyPr wrap="square" lIns="0" tIns="0" rIns="0" bIns="0" rtlCol="0">
-            <a:noAutofit/>
-          </a:bodyPr>
-          <a:lstStyle/>
-          <a:p>
-            <a:r>
-              <a:rPr lang="es-CO" sz="1800" b="1" dirty="0">
-                <a:solidFill>
-                  <a:srgbClr val="111111"/>
-                </a:solidFill>
-                <a:latin typeface="Segoe UI" panose="020B0502040204020203" pitchFamily="34" charset="0"/>
-              </a:rPr>
-              <a:t>Calidad</a:t>
-            </a:r>
-          </a:p>
-        </p:txBody>
-      </p:sp>
-      <p:sp>
-        <p:nvSpPr>
-          <p:cNvPr id="34" name="C2 KPI2 Cap"/>
-          <p:cNvSpPr txBox="1"/>
-          <p:nvPr/>
-        </p:nvSpPr>
-        <p:spPr>
-          <a:xfrm>
-            <a:off x="8037576" y="7123176"/>
-            <a:ext cx="3639312" cy="594360"/>
-          </a:xfrm>
-          <a:prstGeom prst="rect">
-            <a:avLst/>
-          </a:prstGeom>
-          <a:noFill/>
-        </p:spPr>
-        <p:txBody>
-          <a:bodyPr wrap="square" lIns="0" tIns="0" rIns="0" bIns="0" rtlCol="0">
-            <a:noAutofit/>
-          </a:bodyPr>
-          <a:lstStyle/>
-          <a:p>
-            <a:pPr>
-              <a:lnSpc>
-                <a:spcPct val="95000"/>
-              </a:lnSpc>
-            </a:pPr>
-            <a:r>
-              <a:rPr lang="es-CO" sz="1350" dirty="0">
-                <a:solidFill>
-                  <a:srgbClr val="3A342E"/>
-                </a:solidFill>
-                <a:latin typeface="Segoe UI" panose="020B0502040204020203" pitchFamily="34" charset="0"/>
-              </a:rPr>
-              <a:t>Diseño y automatización de pruebas</a:t>
-            </a:r>
-          </a:p>
-        </p:txBody>
-      </p:sp>
-      <p:sp>
-        <p:nvSpPr>
-          <p:cNvPr id="35" name="C2 KPI3 Num"/>
-          <p:cNvSpPr txBox="1"/>
-          <p:nvPr/>
-        </p:nvSpPr>
-        <p:spPr>
-          <a:xfrm>
-            <a:off x="6620256" y="8046720"/>
-            <a:ext cx="1417320" cy="658368"/>
-          </a:xfrm>
-          <a:prstGeom prst="rect">
-            <a:avLst/>
-          </a:prstGeom>
-          <a:noFill/>
-        </p:spPr>
-        <p:txBody>
-          <a:bodyPr wrap="square" lIns="0" tIns="0" rIns="0" bIns="0" rtlCol="0">
-            <a:noAutofit/>
-          </a:bodyPr>
-          <a:lstStyle/>
-          <a:p>
-            <a:r>
-              <a:rPr lang="es-CO" sz="3900" b="1" dirty="0">
-                <a:solidFill>
-                  <a:srgbClr val="EE1C25"/>
-                </a:solidFill>
-                <a:latin typeface="Segoe UI" panose="020B0502040204020203" pitchFamily="34" charset="0"/>
-              </a:rPr>
-              <a:t>95</a:t>
-            </a:r>
-            <a:r>
-              <a:rPr lang="es-CO" sz="1950" b="1" baseline="28000" dirty="0">
-                <a:solidFill>
-                  <a:srgbClr val="EE1C25"/>
-                </a:solidFill>
-                <a:latin typeface="Segoe UI" panose="020B0502040204020203" pitchFamily="34" charset="0"/>
-              </a:rPr>
-              <a:t>%</a:t>
-            </a:r>
-          </a:p>
-        </p:txBody>
-      </p:sp>
-      <p:sp>
-        <p:nvSpPr>
-          <p:cNvPr id="36" name="C2 KPI3 Label"/>
-          <p:cNvSpPr txBox="1"/>
-          <p:nvPr/>
-        </p:nvSpPr>
-        <p:spPr>
-          <a:xfrm>
-            <a:off x="8037576" y="8302752"/>
-            <a:ext cx="3639312" cy="329184"/>
-          </a:xfrm>
-          <a:prstGeom prst="rect">
-            <a:avLst/>
-          </a:prstGeom>
-          <a:noFill/>
-        </p:spPr>
-        <p:txBody>
-          <a:bodyPr wrap="square" lIns="0" tIns="0" rIns="0" bIns="0" rtlCol="0">
-            <a:noAutofit/>
-          </a:bodyPr>
-          <a:lstStyle/>
-          <a:p>
-            <a:r>
-              <a:rPr lang="es-CO" sz="1800" b="1" dirty="0">
-                <a:solidFill>
-                  <a:srgbClr val="111111"/>
-                </a:solidFill>
-                <a:latin typeface="Segoe UI" panose="020B0502040204020203" pitchFamily="34" charset="0"/>
-              </a:rPr>
-              <a:t>Obsolescencia Tecnológica</a:t>
-            </a:r>
-          </a:p>
-        </p:txBody>
-      </p:sp>
-      <p:sp>
-        <p:nvSpPr>
-          <p:cNvPr id="37" name="C2 KPI3 Cap"/>
-          <p:cNvSpPr txBox="1"/>
-          <p:nvPr/>
-        </p:nvSpPr>
-        <p:spPr>
-          <a:xfrm>
-            <a:off x="8037576" y="8631936"/>
-            <a:ext cx="3639312" cy="594360"/>
-          </a:xfrm>
-          <a:prstGeom prst="rect">
-            <a:avLst/>
-          </a:prstGeom>
-          <a:noFill/>
-        </p:spPr>
-        <p:txBody>
-          <a:bodyPr wrap="square" lIns="0" tIns="0" rIns="0" bIns="0" rtlCol="0">
-            <a:noAutofit/>
-          </a:bodyPr>
-          <a:lstStyle/>
-          <a:p>
-            <a:pPr>
-              <a:lnSpc>
-                <a:spcPct val="95000"/>
-              </a:lnSpc>
-            </a:pPr>
-            <a:r>
-              <a:rPr lang="es-CO" sz="1350" dirty="0">
-                <a:solidFill>
-                  <a:srgbClr val="3A342E"/>
-                </a:solidFill>
-                <a:latin typeface="Segoe UI" panose="020B0502040204020203" pitchFamily="34" charset="0"/>
-              </a:rPr>
-              <a:t>Migración de APIs</a:t>
-            </a:r>
-          </a:p>
-        </p:txBody>
-      </p:sp>
-      <p:sp>
-        <p:nvSpPr>
-          <p:cNvPr id="38" name="Pill Meta"/>
-          <p:cNvSpPr/>
-          <p:nvPr/>
-        </p:nvSpPr>
-        <p:spPr>
-          <a:xfrm>
-            <a:off x="12362688" y="5029200"/>
-            <a:ext cx="1440180" cy="411480"/>
-          </a:xfrm>
-          <a:prstGeom prst="roundRect">
-            <a:avLst>
-              <a:gd name="adj" fmla="val 20000"/>
-            </a:avLst>
-          </a:prstGeom>
-          <a:solidFill>
-            <a:srgbClr val="EE1C25"/>
-          </a:solidFill>
-          <a:ln>
-            <a:noFill/>
-          </a:ln>
-          <a:effectLst/>
-        </p:spPr>
-        <p:txBody>
-          <a:bodyPr wrap="none" lIns="0" tIns="0" rIns="0" bIns="0" rtlCol="0" anchor="ctr"/>
-          <a:lstStyle/>
-          <a:p>
-            <a:pPr algn="ctr"/>
-            <a:r>
-              <a:rPr lang="es-CO" sz="1650" b="1" dirty="0">
-                <a:solidFill>
-                  <a:srgbClr val="FFFFFF"/>
-                </a:solidFill>
-                <a:latin typeface="Consolas" panose="020B0609020204030204" pitchFamily="49" charset="0"/>
-              </a:rPr>
-              <a:t>META</a:t>
-            </a:r>
-          </a:p>
-        </p:txBody>
-      </p:sp>
-      <p:sp>
-        <p:nvSpPr>
-          <p:cNvPr id="40" name="Icono Celulas"/>
-          <p:cNvSpPr txBox="1"/>
-          <p:nvPr/>
-        </p:nvSpPr>
-        <p:spPr>
-          <a:xfrm>
-            <a:off x="16047720" y="5997702"/>
-            <a:ext cx="1371600" cy="1005840"/>
-          </a:xfrm>
-          <a:prstGeom prst="rect">
-            <a:avLst/>
-          </a:prstGeom>
-          <a:noFill/>
-        </p:spPr>
-        <p:txBody>
-          <a:bodyPr wrap="square" lIns="0" tIns="0" rIns="0" bIns="0" rtlCol="0">
-            <a:noAutofit/>
-          </a:bodyPr>
-          <a:lstStyle/>
-          <a:p>
-            <a:pPr algn="ctr"/>
-            <a:r>
-              <a:rPr lang="es-CO" sz="6300" dirty="0">
-                <a:solidFill>
-                  <a:srgbClr val="EE1C25"/>
-                </a:solidFill>
-                <a:latin typeface="Segoe MDL2 Assets" panose="050A0102010101010101" pitchFamily="18" charset="0"/>
-              </a:rPr>
-              <a:t></a:t>
-            </a:r>
-          </a:p>
-        </p:txBody>
-      </p:sp>
-      <p:sp>
-        <p:nvSpPr>
-          <p:cNvPr id="39" name="Hero Meta"/>
-          <p:cNvSpPr txBox="1"/>
-          <p:nvPr/>
-        </p:nvSpPr>
-        <p:spPr>
-          <a:xfrm>
-            <a:off x="12362688" y="5532120"/>
-            <a:ext cx="5056632" cy="1828800"/>
-          </a:xfrm>
-          <a:prstGeom prst="rect">
-            <a:avLst/>
-          </a:prstGeom>
-          <a:noFill/>
-        </p:spPr>
-        <p:txBody>
-          <a:bodyPr wrap="square" lIns="0" tIns="0" rIns="0" bIns="0" rtlCol="0">
-            <a:noAutofit/>
-          </a:bodyPr>
-          <a:lstStyle/>
-          <a:p>
-            <a:r>
-              <a:rPr lang="es-CO" sz="12000" b="1" dirty="0">
-                <a:solidFill>
-                  <a:srgbClr val="EE1C25"/>
-                </a:solidFill>
-                <a:latin typeface="Segoe UI" panose="020B0502040204020203" pitchFamily="34" charset="0"/>
-              </a:rPr>
-              <a:t>50</a:t>
-            </a:r>
-            <a:r>
-              <a:rPr lang="es-CO" sz="4800" b="1" baseline="28000" dirty="0">
-                <a:solidFill>
-                  <a:srgbClr val="EE1C25"/>
-                </a:solidFill>
-                <a:latin typeface="Segoe UI" panose="020B0502040204020203" pitchFamily="34" charset="0"/>
-              </a:rPr>
-              <a:t>%</a:t>
-            </a:r>
-          </a:p>
-        </p:txBody>
-      </p:sp>
-      <p:sp>
-        <p:nvSpPr>
-          <p:cNvPr id="41" name="Caption Meta"/>
-          <p:cNvSpPr txBox="1"/>
-          <p:nvPr/>
-        </p:nvSpPr>
-        <p:spPr>
-          <a:xfrm>
-            <a:off x="12362688" y="7589520"/>
-            <a:ext cx="5056632" cy="329184"/>
-          </a:xfrm>
-          <a:prstGeom prst="rect">
-            <a:avLst/>
-          </a:prstGeom>
-          <a:noFill/>
-        </p:spPr>
-        <p:txBody>
-          <a:bodyPr wrap="square" lIns="0" tIns="0" rIns="0" bIns="0" rtlCol="0">
-            <a:noAutofit/>
-          </a:bodyPr>
-          <a:lstStyle/>
-          <a:p>
-            <a:r>
-              <a:rPr lang="es-CO" sz="1050" spc="210" dirty="0">
-                <a:solidFill>
-                  <a:srgbClr val="7A7269"/>
-                </a:solidFill>
-                <a:latin typeface="Consolas" panose="020B0609020204030204" pitchFamily="49" charset="0"/>
-              </a:rPr>
-              <a:t>REDUCCIÓN DE ESFUERZO · DESARROLLO Y CALIDAD</a:t>
-            </a:r>
-          </a:p>
-        </p:txBody>
-      </p:sp>
-      <p:sp>
-        <p:nvSpPr>
-          <p:cNvPr id="42" name="Cuerpo Col 3"/>
-          <p:cNvSpPr txBox="1"/>
-          <p:nvPr/>
-        </p:nvSpPr>
-        <p:spPr>
-          <a:xfrm>
-            <a:off x="12362688" y="8046720"/>
-            <a:ext cx="5056632" cy="1188720"/>
-          </a:xfrm>
-          <a:prstGeom prst="rect">
-            <a:avLst/>
-          </a:prstGeom>
-          <a:noFill/>
-        </p:spPr>
-        <p:txBody>
-          <a:bodyPr wrap="square" lIns="0" tIns="0" rIns="0" bIns="0" rtlCol="0">
-            <a:noAutofit/>
-          </a:bodyPr>
-          <a:lstStyle/>
-          <a:p>
-            <a:pPr>
-              <a:lnSpc>
-                <a:spcPct val="95000"/>
-              </a:lnSpc>
-            </a:pPr>
-            <a:r>
-              <a:rPr lang="es-CO" sz="1650" dirty="0">
-                <a:solidFill>
-                  <a:srgbClr val="3A342E"/>
-                </a:solidFill>
-                <a:latin typeface="Segoe UI" panose="020B0502040204020203" pitchFamily="34" charset="0"/>
+            <a:r>
+              <a:rPr lang="es-CO" sz="1650">
+                <a:solidFill>
+                  <a:srgbClr val="5B6880"/>
+                </a:solidFill>
+                <a:latin typeface="Roboto Condensed" panose="02000000000000000000" pitchFamily="2" charset="0"/>
+                <a:ea typeface="Roboto Condensed" panose="02000000000000000000" pitchFamily="2" charset="0"/>
+                <a:cs typeface="Roboto Condensed" panose="02000000000000000000" pitchFamily="2" charset="0"/>
               </a:rPr>
               <a:t>Medición integral de </a:t>
             </a:r>
             <a:r>
-              <a:rPr lang="es-CO" sz="1650" b="1" dirty="0">
-                <a:solidFill>
-                  <a:srgbClr val="3A342E"/>
-                </a:solidFill>
-                <a:latin typeface="Segoe UI" panose="020B0502040204020203" pitchFamily="34" charset="0"/>
-              </a:rPr>
-              <a:t>Desarrollo</a:t>
-            </a:r>
-            <a:r>
-              <a:rPr lang="es-CO" sz="1650" dirty="0">
-                <a:solidFill>
-                  <a:srgbClr val="3A342E"/>
-                </a:solidFill>
-                <a:latin typeface="Segoe UI" panose="020B0502040204020203" pitchFamily="34" charset="0"/>
-              </a:rPr>
-              <a:t> y </a:t>
-            </a:r>
-            <a:r>
-              <a:rPr lang="es-CO" sz="1650" b="1" dirty="0">
-                <a:solidFill>
-                  <a:srgbClr val="3A342E"/>
-                </a:solidFill>
-                <a:latin typeface="Segoe UI" panose="020B0502040204020203" pitchFamily="34" charset="0"/>
-              </a:rPr>
-              <a:t>Calidad</a:t>
-            </a:r>
-            <a:r>
-              <a:rPr lang="es-CO" sz="1650" dirty="0">
-                <a:solidFill>
-                  <a:srgbClr val="3A342E"/>
-                </a:solidFill>
-                <a:latin typeface="Segoe UI" panose="020B0502040204020203" pitchFamily="34" charset="0"/>
+              <a:rPr lang="es-CO" sz="1650" b="1">
+                <a:solidFill>
+                  <a:srgbClr val="07133D"/>
+                </a:solidFill>
+                <a:latin typeface="Roboto Condensed" panose="02000000000000000000" pitchFamily="2" charset="0"/>
+                <a:ea typeface="Roboto Condensed" panose="02000000000000000000" pitchFamily="2" charset="0"/>
+                <a:cs typeface="Roboto Condensed" panose="02000000000000000000" pitchFamily="2" charset="0"/>
+              </a:rPr>
+              <a:t>Desarrollo y Calidad</a:t>
+            </a:r>
+            <a:r>
+              <a:rPr lang="es-CO" sz="1650">
+                <a:solidFill>
+                  <a:srgbClr val="5B6880"/>
+                </a:solidFill>
+                <a:latin typeface="Roboto Condensed" panose="02000000000000000000" pitchFamily="2" charset="0"/>
+                <a:ea typeface="Roboto Condensed" panose="02000000000000000000" pitchFamily="2" charset="0"/>
+                <a:cs typeface="Roboto Condensed" panose="02000000000000000000" pitchFamily="2" charset="0"/>
               </a:rPr>
               <a:t> dentro de las células, para dimensionar el impacto real y llevar la IA a la forma de trabajo del equipo.</a:t>
             </a:r>
           </a:p>
         </p:txBody>
       </p:sp>
-      <p:cxnSp>
-        <p:nvCxnSpPr>
-          <p:cNvPr id="43" name="Regla Pie"/>
-          <p:cNvCxnSpPr/>
-          <p:nvPr/>
-        </p:nvCxnSpPr>
-        <p:spPr>
-          <a:xfrm>
-            <a:off x="877824" y="9418320"/>
-            <a:ext cx="16541496" cy="0"/>
-          </a:xfrm>
-          <a:prstGeom prst="line">
-            <a:avLst/>
-          </a:prstGeom>
-          <a:ln w="12700">
-            <a:solidFill>
-              <a:srgbClr val="D8D0C6"/>
-            </a:solidFill>
-          </a:ln>
-        </p:spPr>
-        <p:style>
-          <a:lnRef idx="2">
-            <a:schemeClr val="accent1"/>
-          </a:lnRef>
-          <a:fillRef idx="0">
-            <a:schemeClr val="accent1"/>
-          </a:fillRef>
-          <a:effectRef idx="1">
-            <a:schemeClr val="accent1"/>
-          </a:effectRef>
-          <a:fontRef idx="minor">
-            <a:schemeClr val="tx1"/>
-          </a:fontRef>
-        </p:style>
-      </p:cxnSp>
-      <p:sp>
-        <p:nvSpPr>
-          <p:cNvPr id="44" name="Pie Izquierdo"/>
-          <p:cNvSpPr txBox="1"/>
-          <p:nvPr/>
-        </p:nvSpPr>
-        <p:spPr>
-          <a:xfrm>
-            <a:off x="876300" y="9886951"/>
-            <a:ext cx="10668000" cy="415499"/>
-          </a:xfrm>
-          <a:prstGeom prst="rect">
-            <a:avLst/>
-          </a:prstGeom>
-          <a:noFill/>
-        </p:spPr>
-        <p:txBody>
-          <a:bodyPr wrap="square" lIns="0" tIns="0" rIns="0" bIns="0" rtlCol="0">
-            <a:noAutofit/>
-          </a:bodyPr>
-          <a:lstStyle/>
-          <a:p>
-            <a:r>
-              <a:rPr lang="es-CO" sz="1050" spc="210" dirty="0">
-                <a:solidFill>
-                  <a:srgbClr val="7A7269"/>
-                </a:solidFill>
-                <a:latin typeface="Consolas" panose="020B0609020204030204" pitchFamily="49" charset="0"/>
-              </a:rPr>
-              <a:t>LÍNEA BASE · ESFUERZO MANUAL DEL EQUIPO   ·   MEDICIÓN SOBRE CASOS DE USO REALES</a:t>
-            </a:r>
+      <p:sp>
+        <p:nvSpPr>
+          <p:cNvPr id="37" name="Numero de lamina"/>
+          <p:cNvSpPr/>
+          <p:nvPr/>
+        </p:nvSpPr>
+        <p:spPr>
+          <a:xfrm>
+            <a:off x="16802100" y="9834372"/>
+            <a:ext cx="617220" cy="274320"/>
+          </a:xfrm>
+          <a:prstGeom prst="rect">
+            <a:avLst/>
+          </a:prstGeom>
+          <a:noFill/>
+          <a:ln/>
+        </p:spPr>
+        <p:txBody>
+          <a:bodyPr wrap="square" lIns="0" tIns="0" rIns="0" bIns="0" rtlCol="0" anchor="ctr"/>
+          <a:lstStyle/>
+          <a:p>
+            <a:pPr algn="r"/>
+            <a:fld id="{5C4E1A62-3F7B-4D89-9E13-A8C6B04D27F1}" type="slidenum">
+              <a:rPr lang="es-CO" sz="1200">
+                <a:solidFill>
+                  <a:srgbClr val="5B6880"/>
+                </a:solidFill>
+              </a:rPr>
+              <a:t>1</a:t>
+            </a:fld>
+            <a:endParaRPr lang="es-CO" sz="1200">
+              <a:solidFill>
+                <a:srgbClr val="5B6880"/>
+              </a:solidFill>
+            </a:endParaRPr>
           </a:p>
         </p:txBody>
       </p:sp>
